--- a/Lending_Hub_EPIC_8.pptx
+++ b/Lending_Hub_EPIC_8.pptx
@@ -4103,7 +4103,7 @@
                 </a:solidFill>
                 <a:latin typeface="Segoe UI"/>
               </a:rPr>
-              <a:t>These are not error states. Each is a place where a default value would have become the production value, because nobody ever passed the argument.</a:t>
+              <a:t>None of these is a bug. Each is a spot where an invented number would have quietly become the real one, because nobody would ever have gone back to check it.</a:t>
             </a:r>
           </a:p>
         </p:txBody>
@@ -5310,7 +5310,7 @@
                 </a:solidFill>
                 <a:latin typeface="Segoe UI"/>
               </a:rPr>
-              <a:t>98 blocking tickets are registered, each with a named owner and the exact decision required. That register is the honest project plan: it says what a bank must decide before any of this scores a real customer.</a:t>
+              <a:t>98 open items, each naming who must decide it and what the decision is. That list is the real project plan — it says exactly what a bank has to settle before any of this touches a customer.</a:t>
             </a:r>
           </a:p>
         </p:txBody>
@@ -5516,7 +5516,7 @@
                 </a:solidFill>
                 <a:latin typeface="Segoe UI"/>
               </a:rPr>
-              <a:t>A rule enforced by a code-review comment is a rule that lapses the first busy week. These are enforced by constructors, so the dangerous state cannot be represented at all.</a:t>
+              <a:t>A rule that depends on someone remembering it fails the first busy week. These are built into the code itself, so the unsafe version simply cannot be written.</a:t>
             </a:r>
           </a:p>
         </p:txBody>
@@ -6185,7 +6185,7 @@
                 </a:solidFill>
                 <a:latin typeface="Segoe UI"/>
               </a:rPr>
-              <a:t>An alert cannot exist without an owner, an SLA and a recommended action — because an alert missing any of the three is a notification, and the difference stops being visible once it is in a queue.</a:t>
+              <a:t>An alert cannot be created without an owner, a deadline and a recommended action. Without all three it is just a notification — and once it is sitting in a queue, nobody can tell the difference.</a:t>
             </a:r>
           </a:p>
         </p:txBody>
@@ -6524,7 +6524,7 @@
                 </a:solidFill>
                 <a:latin typeface="Segoe UI"/>
               </a:rPr>
-              <a:t>Building against a document is the only reliable way to test it. Each finding is a place where the specification read as complete until code had to produce a number.</a:t>
+              <a:t>Writing the code is the only reliable way to test a design document. Each of these is a place the design looked finished until someone had to produce an actual number.</a:t>
             </a:r>
           </a:p>
         </p:txBody>
@@ -6614,7 +6614,7 @@
                 </a:solidFill>
                 <a:latin typeface="Segoe UI"/>
               </a:rPr>
-              <a:t>The change-point instruction names a quantity that is identically the hazard rate under constant hazard — it detects nothing, on any data. The real signal is one index over.</a:t>
+              <a:t>The design told us to watch a number that never changes, whatever the data does. It could never have detected anything. The real signal was one step away.</a:t>
             </a:r>
           </a:p>
         </p:txBody>
@@ -6793,7 +6793,7 @@
                 </a:solidFill>
                 <a:latin typeface="Segoe UI"/>
               </a:rPr>
-              <a:t>Uplift from observational logs is unidentifiable, not merely unmeasured — more data narrows the interval around a biased number, turning visible uncertainty into invisible bias.</a:t>
+              <a:t>You cannot tell whether an action helped unless you also left some customers alone. Collecting more data does not fix it — it just makes the wrong answer look confident.</a:t>
             </a:r>
           </a:p>
         </p:txBody>
@@ -6972,7 +6972,7 @@
                 </a:solidFill>
                 <a:latin typeface="Segoe UI"/>
               </a:rPr>
-              <a:t>The frontend phase cites SRS §11.4–§11.8 and UX-1…UX-9 as binding. None exists. The screen inventory it depends on is unrecoverable.</a:t>
+              <a:t>The screen design brief points at sections of the specification that do not exist. The list of screens it depends on cannot be recovered.</a:t>
             </a:r>
           </a:p>
         </p:txBody>
@@ -7151,7 +7151,7 @@
                 </a:solidFill>
                 <a:latin typeface="Segoe UI"/>
               </a:rPr>
-              <a:t>Effective dates cannot express partial supersession — two circulars in force, one amending the other in part. Both pass the filter; the model picks.</a:t>
+              <a:t>Two policy documents can both be current, with the newer one changing only part of the older. Dates alone cannot express that, so the assistant would pick one at random.</a:t>
             </a:r>
           </a:p>
         </p:txBody>
@@ -7330,7 +7330,7 @@
                 </a:solidFill>
                 <a:latin typeface="Segoe UI"/>
               </a:rPr>
-              <a:t>A correction to our own first result: capture was scored against defaults the detector could never have reached, measuring the split rather than the model.</a:t>
+              <a:t>We corrected ourselves: our first score counted defaults the system had no chance of seeing, so we were measuring the calendar rather than the model.</a:t>
             </a:r>
           </a:p>
         </p:txBody>
@@ -7625,7 +7625,7 @@
                 </a:solidFill>
                 <a:latin typeface="Segoe UI"/>
               </a:rPr>
-              <a:t>A standard-library HTTP gateway serves the interface surfaces. Four routes return values computed by the engines; seventeen return a structured refusal naming the ticket, its owner and the reason.</a:t>
+              <a:t>One backend serves all the screens. Four of its endpoints return numbers the engines actually worked out. Seventeen politely refuse, naming who has to unblock them and why.</a:t>
             </a:r>
           </a:p>
           <a:p>
@@ -7647,7 +7647,7 @@
                 </a:solidFill>
                 <a:latin typeface="Segoe UI"/>
               </a:rPr>
-              <a:t>The frontend is Next.js and TypeScript, and the attribution triplet is a type: a component cannot be handed a score that does not carry its model id, model version and decision-log reference. The client throws rather than render an unattributable number.</a:t>
+              <a:t>Every score arriving at a screen must say which model produced it, which version, and which decision it belongs to. A screen literally cannot be given a number without that label — the app rejects it rather than showing it.</a:t>
             </a:r>
           </a:p>
         </p:txBody>
@@ -7780,7 +7780,7 @@
                 </a:solidFill>
                 <a:latin typeface="Segoe UI"/>
               </a:rPr>
-              <a:t>Verified end to end, not asserted: a headless browser loads the officer queue, the gateway logs the request, and the refusal renders with its ticket and owner. A computed instalment of ₹11,248.97 travels client → HTTP → the pricing engine.</a:t>
+              <a:t>We checked this by running it, not by claiming it. A browser opens the officer screen, the backend logs the request, and the refusal appears with its owner. A real instalment of ₹11,248.97 travels the whole way from the screen to the pricing engine and back.</a:t>
             </a:r>
           </a:p>
         </p:txBody>
@@ -8926,7 +8926,7 @@
                 </a:solidFill>
                 <a:latin typeface="Segoe UI"/>
               </a:rPr>
-              <a:t>This is the slide most decks leave out. Every phase gate reports Track B evidence: 0 — because Track B is a bank deployment, and there is no bank attached. Saying so is the point.</a:t>
+              <a:t>Most teams leave this slide out. Every stage reports zero verified results, because verification needs the bank's own systems and data, which we do not have. Saying so plainly is the point.</a:t>
             </a:r>
           </a:p>
         </p:txBody>
@@ -9910,7 +9910,7 @@
                 </a:solidFill>
                 <a:latin typeface="Segoe UI"/>
               </a:rPr>
-              <a:t>What this buys a bank. The boundary is explicit and reviewable. Every deterministic computation in the programme is built and tested; every blocked value has a named owner and a ticket. Nothing has to be unpicked later because someone guessed — the guesses were never made.</a:t>
+              <a:t>What a bank gets from this. Everything that can be built is built and tested. Everything that cannot names who must decide it. Nothing has to be torn out later because somebody guessed — because nobody guessed.</a:t>
             </a:r>
           </a:p>
         </p:txBody>
@@ -10855,7 +10855,7 @@
                 </a:solidFill>
                 <a:latin typeface="Segoe UI"/>
               </a:rPr>
-              <a:t>A plausible-looking cutoff that nobody ratified survives code review, ships, and is still in a report a year later. An agri model validated on the wrong agro-zone looks identical to one validated correctly. A default model scored on the window it was trained on reports excellent numbers and fails in production.</a:t>
+              <a:t>If someone types a cut-off nobody approved, it looks reasonable, passes review, and is still being used a year later. A model tested on the wrong region looks exactly like one tested correctly. A model marked on its own homework scores brilliantly and then fails with real customers.</a:t>
             </a:r>
           </a:p>
           <a:p>
@@ -10877,7 +10877,7 @@
                 </a:solidFill>
                 <a:latin typeface="Segoe UI"/>
               </a:rPr>
-              <a:t>So this build inverts the usual priority. Every number must trace to one of three sources, and code that cannot find one refuses to run rather than guessing.</a:t>
+              <a:t>So we flipped the priority. Every number has to come from one of three places. If the code cannot find one, it stops and says so instead of guessing.</a:t>
             </a:r>
           </a:p>
         </p:txBody>
@@ -11012,7 +11012,7 @@
                 </a:solidFill>
                 <a:latin typeface="Segoe UI"/>
               </a:rPr>
-              <a:t>Written in the specification</a:t>
+              <a:t>It is in the design document</a:t>
             </a:r>
           </a:p>
         </p:txBody>
@@ -11057,7 +11057,7 @@
                 </a:solidFill>
                 <a:latin typeface="Segoe UI"/>
               </a:rPr>
-              <a:t>A formula, a threshold the document fixes</a:t>
+              <a:t>A formula or a limit the document already fixes</a:t>
             </a:r>
           </a:p>
         </p:txBody>
@@ -11191,7 +11191,7 @@
                 </a:solidFill>
                 <a:latin typeface="Segoe UI"/>
               </a:rPr>
-              <a:t>Computed by a committed script</a:t>
+              <a:t>A script worked it out</a:t>
             </a:r>
           </a:p>
         </p:txBody>
@@ -11236,7 +11236,7 @@
                 </a:solidFill>
                 <a:latin typeface="Segoe UI"/>
               </a:rPr>
-              <a:t>Rerunnable, versioned, auditable</a:t>
+              <a:t>Anyone can re-run it and get the same answer</a:t>
             </a:r>
           </a:p>
         </p:txBody>
@@ -11370,7 +11370,7 @@
                 </a:solidFill>
                 <a:latin typeface="Segoe UI"/>
               </a:rPr>
-              <a:t>Supplied by a named committee</a:t>
+              <a:t>A named team decided it</a:t>
             </a:r>
           </a:p>
         </p:txBody>
@@ -11415,7 +11415,7 @@
                 </a:solidFill>
                 <a:latin typeface="Segoe UI"/>
               </a:rPr>
-              <a:t>In writing, with an owner</a:t>
+              <a:t>In writing, with someone accountable</a:t>
             </a:r>
           </a:p>
         </p:txBody>
@@ -11592,7 +11592,7 @@
                 </a:solidFill>
                 <a:latin typeface="Segoe UI"/>
               </a:rPr>
-              <a:t>Anything else is a build failure. A grounding check scans 350 files on every commit and fails the build on an ungrounded value.</a:t>
+              <a:t>Anything else stops the build. An automatic check reads all 350 files every time we save work, and rejects any number that cannot say where it came from.</a:t>
             </a:r>
           </a:p>
         </p:txBody>
@@ -11808,7 +11808,7 @@
                 </a:solidFill>
                 <a:latin typeface="Segoe UI"/>
               </a:rPr>
-              <a:t>Agricultural lending fails on both sides at once, and the two failures cause each other: thin files make banks cautious, and caution pushes farmers to informal credit that leaves no file.</a:t>
+              <a:t>Farm lending fails on both sides at once, and each side makes the other worse: no credit history makes banks cautious, and caution pushes farmers to moneylenders, which leaves no credit history.</a:t>
             </a:r>
           </a:p>
         </p:txBody>
@@ -12389,7 +12389,7 @@
                 </a:solidFill>
                 <a:latin typeface="Segoe UI"/>
               </a:rPr>
-              <a:t>A tenor that ignores the harvest calendar turns a good borrower into a delinquent one.</a:t>
+              <a:t>Repayments that ignore the harvest calendar turn a good borrower into a late one.</a:t>
             </a:r>
           </a:p>
         </p:txBody>
@@ -12523,7 +12523,7 @@
                 </a:solidFill>
                 <a:latin typeface="Segoe UI"/>
               </a:rPr>
-              <a:t>Thin-file underwriting</a:t>
+              <a:t>Too little to go on</a:t>
             </a:r>
           </a:p>
         </p:txBody>
@@ -12568,7 +12568,7 @@
                 </a:solidFill>
                 <a:latin typeface="Segoe UI"/>
               </a:rPr>
-              <a:t>Traditional scorecards have little signal, so good farmers are declined alongside bad ones.</a:t>
+              <a:t>Traditional credit models have almost nothing to work with, so good farmers are declined alongside bad ones.</a:t>
             </a:r>
           </a:p>
         </p:txBody>
@@ -12970,7 +12970,7 @@
                 </a:solidFill>
                 <a:latin typeface="Segoe UI"/>
               </a:rPr>
-              <a:t>Distress is visible in behaviour months before a missed EMI, and nobody is watching for it.</a:t>
+              <a:t>Trouble is visible in a borrower's behaviour months before a missed payment, and nobody is watching for it.</a:t>
             </a:r>
           </a:p>
         </p:txBody>
@@ -13310,7 +13310,7 @@
                 </a:solidFill>
                 <a:latin typeface="Segoe UI"/>
               </a:rPr>
-              <a:t>SPI/SPEI drought indices and vegetation time series make the land itself the evidence when the bureau has nothing.</a:t>
+              <a:t>Rainfall shortfall and crop-greenness history make the land itself the evidence when there is no credit record.</a:t>
             </a:r>
           </a:p>
         </p:txBody>
@@ -13489,7 +13489,7 @@
                 </a:solidFill>
                 <a:latin typeface="Segoe UI"/>
               </a:rPr>
-              <a:t>Scoring in the serving path</a:t>
+              <a:t>Automated scoring, with reasons</a:t>
             </a:r>
           </a:p>
         </p:txBody>
@@ -13534,7 +13534,7 @@
                 </a:solidFill>
                 <a:latin typeface="Segoe UI"/>
               </a:rPr>
-              <a:t>A scorecard and a GBM challenger behind one orchestrator, with SHAP reason codes attached to the decision.</a:t>
+              <a:t>A transparent scorecard plus a stronger model behind it, and every decision arrives with the reasons that drove it.</a:t>
             </a:r>
           </a:p>
         </p:txBody>
@@ -13713,7 +13713,7 @@
                 </a:solidFill>
                 <a:latin typeface="Segoe UI"/>
               </a:rPr>
-              <a:t>Entity resolution and community detection</a:t>
+              <a:t>Spot the hidden connections</a:t>
             </a:r>
           </a:p>
         </p:txBody>
@@ -13758,7 +13758,7 @@
                 </a:solidFill>
                 <a:latin typeface="Segoe UI"/>
               </a:rPr>
-              <a:t>Shared phone, device, address and account edges; Louvain finds the dense cluster that no single application shows.</a:t>
+              <a:t>Shared phones, devices, addresses and accounts. Finds the tight cluster that no single application would ever reveal.</a:t>
             </a:r>
           </a:p>
         </p:txBody>
@@ -13937,7 +13937,7 @@
                 </a:solidFill>
                 <a:latin typeface="Segoe UI"/>
               </a:rPr>
-              <a:t>Feasible set before recommendation</a:t>
+              <a:t>Work out what fits, then recommend</a:t>
             </a:r>
           </a:p>
         </p:txBody>
@@ -13982,7 +13982,7 @@
                 </a:solidFill>
                 <a:latin typeface="Segoe UI"/>
               </a:rPr>
-              <a:t>The bandit may only choose inside what policy already permits — affordability is a constraint, never a suggestion.</a:t>
+              <a:t>The recommender can only pick from what the borrower can actually afford. Affordability is a limit, not advice.</a:t>
             </a:r>
           </a:p>
         </p:txBody>
@@ -14161,7 +14161,7 @@
                 </a:solidFill>
                 <a:latin typeface="Segoe UI"/>
               </a:rPr>
-              <a:t>Templated reasons and a grounded assistant</a:t>
+              <a:t>Answers that cite their source</a:t>
             </a:r>
           </a:p>
         </p:txBody>
@@ -14206,7 +14206,7 @@
                 </a:solidFill>
                 <a:latin typeface="Segoe UI"/>
               </a:rPr>
-              <a:t>Answers carry citations or are refused; decision explanations are selected from approved templates, never composed.</a:t>
+              <a:t>Every answer shows where it came from or is not shown at all. Decision wording is picked from approved text.</a:t>
             </a:r>
           </a:p>
         </p:txBody>
@@ -14385,7 +14385,7 @@
                 </a:solidFill>
                 <a:latin typeface="Segoe UI"/>
               </a:rPr>
-              <a:t>Change-point detection on behaviour</a:t>
+              <a:t>Notice the change in behaviour early</a:t>
             </a:r>
           </a:p>
         </p:txBody>
@@ -14430,7 +14430,7 @@
                 </a:solidFill>
                 <a:latin typeface="Segoe UI"/>
               </a:rPr>
-              <a:t>86% of defaults caught a median 365 days early, measured on 338,210 real account-months.</a:t>
+              <a:t>Catches 86% of defaults, typically a year before they happen — measured on 338,210 real months of loan history.</a:t>
             </a:r>
           </a:p>
         </p:txBody>
@@ -14681,7 +14681,7 @@
                 </a:solidFill>
                 <a:latin typeface="Segoe UI"/>
               </a:rPr>
-              <a:t>Every step writes to the decision log, and every model-derived value carries its model id, version and decision-log reference the whole way to the screen.</a:t>
+              <a:t>Every step is written to a permanent record, and every number a model produced carries a label saying which model made it — all the way to the screen.</a:t>
             </a:r>
           </a:p>
         </p:txBody>
@@ -14949,7 +14949,7 @@
                 </a:solidFill>
                 <a:latin typeface="Segoe UI"/>
               </a:rPr>
-              <a:t>KYC, consent, documents. The consent artifact is logged with the same rigour as the credit decision.</a:t>
+              <a:t>Identity, consent and documents. The consent record is kept as carefully as the credit decision.</a:t>
             </a:r>
           </a:p>
         </p:txBody>
@@ -15262,7 +15262,7 @@
                 </a:solidFill>
                 <a:latin typeface="Segoe UI"/>
               </a:rPr>
-              <a:t>Plot polygon, drought index, vegetation series, bureau pull, cash-flow summary.</a:t>
+              <a:t>Field boundary, rainfall shortfall, crop greenness over time, credit record, bank-statement summary.</a:t>
             </a:r>
           </a:p>
         </p:txBody>
@@ -15575,7 +15575,7 @@
                 </a:solidFill>
                 <a:latin typeface="Segoe UI"/>
               </a:rPr>
-              <a:t>Entity resolution across phone, device, address; velocity and anomaly layers; graph communities.</a:t>
+              <a:t>Match against other applications by phone, device and address. Flag unusual behaviour and hidden clusters.</a:t>
             </a:r>
           </a:p>
         </p:txBody>
@@ -15888,7 +15888,7 @@
                 </a:solidFill>
                 <a:latin typeface="Segoe UI"/>
               </a:rPr>
-              <a:t>Scorecard and GBM challenger; SHAP reason codes; the policy band decides approve, review or decline.</a:t>
+              <a:t>Two models score the application and the reasons are recorded. Policy decides: approve, review or decline.</a:t>
             </a:r>
           </a:p>
         </p:txBody>
@@ -16201,7 +16201,7 @@
                 </a:solidFill>
                 <a:latin typeface="Segoe UI"/>
               </a:rPr>
-              <a:t>Feasible set from ratified caps, ALM pricing, then the bandit ranks inside what policy permits.</a:t>
+              <a:t>Work out what the borrower can afford, price it, then rank the options that policy allows.</a:t>
             </a:r>
           </a:p>
         </p:txBody>
@@ -16514,7 +16514,7 @@
                 </a:solidFill>
                 <a:latin typeface="Segoe UI"/>
               </a:rPr>
-              <a:t>PD/LGD/EAD re-estimated monthly; change-point detection on behaviour raises alerts with an owner.</a:t>
+              <a:t>Risk re-estimated every month. A change in behaviour raises an alert with somebody's name on it.</a:t>
             </a:r>
           </a:p>
         </p:txBody>
@@ -16647,7 +16647,7 @@
                 </a:solidFill>
                 <a:latin typeface="Segoe UI"/>
               </a:rPr>
-              <a:t>The gateway is the only thing the interfaces talk to — never a model service directly. A response that renders a score without its model id and version is rejected by the client rather than displayed, so an unattributable number cannot reach a screen.</a:t>
+              <a:t>The screens only ever talk to one backend, never straight to a model. If a score arrives without its label, the app refuses to show it — so a number nobody can trace never reaches a customer.</a:t>
             </a:r>
           </a:p>
         </p:txBody>
@@ -16780,7 +16780,7 @@
                 </a:solidFill>
                 <a:latin typeface="Segoe UI"/>
               </a:rPr>
-              <a:t>Where a step needs a value nobody has ratified, it stops and names the ticket and its owner. Seventeen of the gateway's twenty-one routes do exactly that today.</a:t>
+              <a:t>Where a step needs a number nobody has approved, it stops and says who must approve it. Seventeen of the twenty-one endpoints do exactly that today.</a:t>
             </a:r>
           </a:p>
         </p:txBody>
@@ -18938,7 +18938,7 @@
                 </a:solidFill>
                 <a:latin typeface="Segoe UI"/>
               </a:rPr>
-              <a:t>This repository has no bank attached. Pretending otherwise is the easiest way to produce a number that looks like evidence and is not. So every figure in every report is stamped with the track that produced it.</a:t>
+              <a:t>We do not have a real bank's data. Pretending we do is the easiest way to show a number that looks like proof and is not. So every figure we report says which kind of data produced it.</a:t>
             </a:r>
           </a:p>
         </p:txBody>
@@ -19161,7 +19161,7 @@
                 </a:solidFill>
                 <a:latin typeface="Segoe UI"/>
               </a:rPr>
-              <a:t>Runs on a laptop, stdlib-only, on synthetic fixtures. Proves the code paths: joins, point-in-time correctness, the serving path, audit arithmetic.</a:t>
+              <a:t>Runs on a laptop with made-up test data. Proves the plumbing works — that the steps connect and the sums add up.</a:t>
             </a:r>
           </a:p>
         </p:txBody>
@@ -19384,7 +19384,7 @@
                 </a:solidFill>
                 <a:latin typeface="Segoe UI"/>
               </a:rPr>
-              <a:t>Real loans, real applications. Proves the code survives what fixtures cannot simulate — real missingness, real class imbalance, real key defects. Real data, but not this bank's.</a:t>
+              <a:t>Real loans and real applications from public datasets. Proves the code copes with messy reality — missing fields, rare events, broken identifiers. Real data, but not this bank's.</a:t>
             </a:r>
           </a:p>
         </p:txBody>
@@ -19607,7 +19607,7 @@
                 </a:solidFill>
                 <a:latin typeface="Segoe UI"/>
               </a:rPr>
-              <a:t>Same interfaces, real backends. The only track that is gate evidence. A Gini on US consumer loans is a fact about US consumer lending.</a:t>
+              <a:t>The bank's own systems and data. This is the only one that counts as real proof. A score measured on US loans tells you about US loans.</a:t>
             </a:r>
           </a:p>
         </p:txBody>
@@ -19740,7 +19740,7 @@
                 </a:solidFill>
                 <a:latin typeface="Segoe UI"/>
               </a:rPr>
-              <a:t>A join rate computed on fixtures is a test of the audit script. A capture rate on a public mortgage panel is a fact about US mortgages. Both are useful. Neither is a gate number, and the reports say so on every line.</a:t>
+              <a:t>Both kinds of testing are useful. Neither is proof about this bank's customers — and every report we produce says so, on every line.</a:t>
             </a:r>
           </a:p>
         </p:txBody>
@@ -21424,7 +21424,7 @@
                 </a:solidFill>
                 <a:latin typeface="Segoe UI"/>
               </a:rPr>
-              <a:t>The GBM's train Gini is 57.79 against a test Gini of 51.94. That gap is reported rather than tuned away — a challenger whose train and test numbers match exactly has usually been fitted to its own test set.</a:t>
+              <a:t>The stronger model scores 57.79 on data it learned from and 51.94 on data it had never seen. We report that gap instead of hiding it — a model that scores the same on both has usually been over-tuned.</a:t>
             </a:r>
           </a:p>
         </p:txBody>
@@ -21557,7 +21557,7 @@
                 </a:solidFill>
                 <a:latin typeface="Segoe UI"/>
               </a:rPr>
-              <a:t>These are Track P numbers: real loans, real missingness, and not this bank's book. Evidence about the implementation, not gate evidence.</a:t>
+              <a:t>These come from real public loan data, not this bank's customers. They prove the software works. They are not proof about this book.</a:t>
             </a:r>
           </a:p>
         </p:txBody>
@@ -21763,7 +21763,7 @@
                 </a:solidFill>
                 <a:latin typeface="Segoe UI"/>
               </a:rPr>
-              <a:t>The early-warning system rests on one premise: an account in trouble shows it before it misses a payment. That premise is testable, and it was tested — on 338,210 real account-months, scoring only the 101 defaults the detector could actually have reached.</a:t>
+              <a:t>The whole idea rests on one assumption: a borrower in trouble shows signs before missing a payment. We tested it on 338,210 real months of loan history, and only counted the 101 defaults the system could realistically have caught in time.</a:t>
             </a:r>
           </a:p>
           <a:p>
@@ -21785,7 +21785,7 @@
                 </a:solidFill>
                 <a:latin typeface="Segoe UI"/>
               </a:rPr>
-              <a:t>At the 95th-percentile threshold the detector catches 86% of reachable defaults with a median lead time of one full year. Tighten to the 99th and capture collapses to 56% — the curve is the operating decision, and it belongs to the Collections Head.</a:t>
+              <a:t>Set the alert bar at the usual level and it catches 86% of them, a typical full year before the default. Make it much stricter and it only catches 56%. Where to set that bar is a business call, not ours.</a:t>
             </a:r>
           </a:p>
         </p:txBody>
@@ -21918,7 +21918,7 @@
                 </a:solidFill>
                 <a:latin typeface="Segoe UI"/>
               </a:rPr>
-              <a:t>A correction to our own work. The first run reported 11% capture. 726 of 827 defaults fell before the detector's first scoreable snapshot — the number was measuring the train/test split, not the detector. Scoring only reachable defaults moved it 8×.</a:t>
+              <a:t>We corrected our own mistake here. The first run said 11%. It turned out 726 of 827 defaults happened before the system had any data to look at — we were measuring the calendar, not the model. Counting only reachable cases moved the answer eight-fold.</a:t>
             </a:r>
           </a:p>
         </p:txBody>

--- a/Lending_Hub_EPIC_8.pptx
+++ b/Lending_Hub_EPIC_8.pptx
@@ -19959,7 +19959,7 @@
         </p:nvSpPr>
         <p:spPr>
           <a:xfrm>
-            <a:off x="658368" y="2286000"/>
+            <a:off x="658368" y="2121408"/>
             <a:ext cx="3200400" cy="228600"/>
           </a:xfrm>
           <a:prstGeom prst="rect">
@@ -20004,7 +20004,7 @@
         </p:nvSpPr>
         <p:spPr>
           <a:xfrm>
-            <a:off x="3858768" y="2286000"/>
+            <a:off x="3858768" y="2121408"/>
             <a:ext cx="2286000" cy="228600"/>
           </a:xfrm>
           <a:prstGeom prst="rect">
@@ -20049,7 +20049,7 @@
         </p:nvSpPr>
         <p:spPr>
           <a:xfrm>
-            <a:off x="6144768" y="2286000"/>
+            <a:off x="6144768" y="2121408"/>
             <a:ext cx="1645920" cy="228600"/>
           </a:xfrm>
           <a:prstGeom prst="rect">
@@ -20094,7 +20094,7 @@
         </p:nvSpPr>
         <p:spPr>
           <a:xfrm>
-            <a:off x="7790688" y="2286000"/>
+            <a:off x="7790688" y="2121408"/>
             <a:ext cx="1828800" cy="228600"/>
           </a:xfrm>
           <a:prstGeom prst="rect">
@@ -20139,7 +20139,7 @@
         </p:nvSpPr>
         <p:spPr>
           <a:xfrm>
-            <a:off x="9619488" y="2286000"/>
+            <a:off x="9619488" y="2121408"/>
             <a:ext cx="1828800" cy="228600"/>
           </a:xfrm>
           <a:prstGeom prst="rect">
@@ -20184,7 +20184,7 @@
         </p:nvSpPr>
         <p:spPr>
           <a:xfrm>
-            <a:off x="658368" y="2560320"/>
+            <a:off x="658368" y="2395728"/>
             <a:ext cx="10789920" cy="12700"/>
           </a:xfrm>
           <a:prstGeom prst="rect">
@@ -20228,7 +20228,7 @@
         </p:nvSpPr>
         <p:spPr>
           <a:xfrm>
-            <a:off x="658368" y="2706624"/>
+            <a:off x="658368" y="2505456"/>
             <a:ext cx="3200400" cy="274320"/>
           </a:xfrm>
           <a:prstGeom prst="rect">
@@ -20260,7 +20260,7 @@
                 </a:solidFill>
                 <a:latin typeface="Segoe UI"/>
               </a:rPr>
-              <a:t>WoE scorecard  (champion)</a:t>
+              <a:t>Scorecard, plain-English rules</a:t>
             </a:r>
           </a:p>
         </p:txBody>
@@ -20273,7 +20273,7 @@
         </p:nvSpPr>
         <p:spPr>
           <a:xfrm>
-            <a:off x="3858768" y="2706624"/>
+            <a:off x="3858768" y="2505456"/>
             <a:ext cx="2286000" cy="274320"/>
           </a:xfrm>
           <a:prstGeom prst="rect">
@@ -20318,7 +20318,7 @@
         </p:nvSpPr>
         <p:spPr>
           <a:xfrm>
-            <a:off x="6144768" y="2706624"/>
+            <a:off x="6144768" y="2505456"/>
             <a:ext cx="1645920" cy="274320"/>
           </a:xfrm>
           <a:prstGeom prst="rect">
@@ -20363,7 +20363,7 @@
         </p:nvSpPr>
         <p:spPr>
           <a:xfrm>
-            <a:off x="7790688" y="2706624"/>
+            <a:off x="7790688" y="2505456"/>
             <a:ext cx="1828800" cy="274320"/>
           </a:xfrm>
           <a:prstGeom prst="rect">
@@ -20408,7 +20408,7 @@
         </p:nvSpPr>
         <p:spPr>
           <a:xfrm>
-            <a:off x="9619488" y="2706624"/>
+            <a:off x="9619488" y="2505456"/>
             <a:ext cx="1828800" cy="274320"/>
           </a:xfrm>
           <a:prstGeom prst="rect">
@@ -20453,7 +20453,7 @@
         </p:nvSpPr>
         <p:spPr>
           <a:xfrm>
-            <a:off x="658368" y="3017520"/>
+            <a:off x="658368" y="2816352"/>
             <a:ext cx="10789920" cy="9525"/>
           </a:xfrm>
           <a:prstGeom prst="rect">
@@ -20497,7 +20497,7 @@
         </p:nvSpPr>
         <p:spPr>
           <a:xfrm>
-            <a:off x="658368" y="3108960"/>
+            <a:off x="658368" y="2871216"/>
             <a:ext cx="3200400" cy="274320"/>
           </a:xfrm>
           <a:prstGeom prst="rect">
@@ -20529,7 +20529,7 @@
                 </a:solidFill>
                 <a:latin typeface="Segoe UI"/>
               </a:rPr>
-              <a:t>GBM  (challenger)</a:t>
+              <a:t>Boosted trees</a:t>
             </a:r>
           </a:p>
         </p:txBody>
@@ -20542,7 +20542,7 @@
         </p:nvSpPr>
         <p:spPr>
           <a:xfrm>
-            <a:off x="3858768" y="3108960"/>
+            <a:off x="3858768" y="2871216"/>
             <a:ext cx="2286000" cy="274320"/>
           </a:xfrm>
           <a:prstGeom prst="rect">
@@ -20587,7 +20587,7 @@
         </p:nvSpPr>
         <p:spPr>
           <a:xfrm>
-            <a:off x="6144768" y="3108960"/>
+            <a:off x="6144768" y="2871216"/>
             <a:ext cx="1645920" cy="274320"/>
           </a:xfrm>
           <a:prstGeom prst="rect">
@@ -20632,7 +20632,7 @@
         </p:nvSpPr>
         <p:spPr>
           <a:xfrm>
-            <a:off x="7790688" y="3108960"/>
+            <a:off x="7790688" y="2871216"/>
             <a:ext cx="1828800" cy="274320"/>
           </a:xfrm>
           <a:prstGeom prst="rect">
@@ -20677,7 +20677,7 @@
         </p:nvSpPr>
         <p:spPr>
           <a:xfrm>
-            <a:off x="9619488" y="3108960"/>
+            <a:off x="9619488" y="2871216"/>
             <a:ext cx="1828800" cy="274320"/>
           </a:xfrm>
           <a:prstGeom prst="rect">
@@ -20722,7 +20722,7 @@
         </p:nvSpPr>
         <p:spPr>
           <a:xfrm>
-            <a:off x="658368" y="3419856"/>
+            <a:off x="658368" y="3182112"/>
             <a:ext cx="10789920" cy="9525"/>
           </a:xfrm>
           <a:prstGeom prst="rect">
@@ -20766,7 +20766,7 @@
         </p:nvSpPr>
         <p:spPr>
           <a:xfrm>
-            <a:off x="658368" y="3511296"/>
+            <a:off x="658368" y="3236976"/>
             <a:ext cx="3200400" cy="274320"/>
           </a:xfrm>
           <a:prstGeom prst="rect">
@@ -20798,7 +20798,7 @@
                 </a:solidFill>
                 <a:latin typeface="Segoe UI"/>
               </a:rPr>
-              <a:t>Discrete-time hazard</a:t>
+              <a:t>Ensemble of 7 models</a:t>
             </a:r>
           </a:p>
         </p:txBody>
@@ -20811,7 +20811,7 @@
         </p:nvSpPr>
         <p:spPr>
           <a:xfrm>
-            <a:off x="3858768" y="3511296"/>
+            <a:off x="3858768" y="3236976"/>
             <a:ext cx="2286000" cy="274320"/>
           </a:xfrm>
           <a:prstGeom prst="rect">
@@ -20843,7 +20843,7 @@
                 </a:solidFill>
                 <a:latin typeface="Segoe UI"/>
               </a:rPr>
-              <a:t>Fannie Mae panel</a:t>
+              <a:t>Home Credit</a:t>
             </a:r>
           </a:p>
         </p:txBody>
@@ -20856,7 +20856,7 @@
         </p:nvSpPr>
         <p:spPr>
           <a:xfrm>
-            <a:off x="6144768" y="3511296"/>
+            <a:off x="6144768" y="3236976"/>
             <a:ext cx="1645920" cy="274320"/>
           </a:xfrm>
           <a:prstGeom prst="rect">
@@ -20888,7 +20888,7 @@
                 </a:solidFill>
                 <a:latin typeface="Consolas"/>
               </a:rPr>
-              <a:t>338,210</a:t>
+              <a:t>307,511</a:t>
             </a:r>
           </a:p>
         </p:txBody>
@@ -20901,7 +20901,7 @@
         </p:nvSpPr>
         <p:spPr>
           <a:xfrm>
-            <a:off x="7790688" y="3511296"/>
+            <a:off x="7790688" y="3236976"/>
             <a:ext cx="1828800" cy="274320"/>
           </a:xfrm>
           <a:prstGeom prst="rect">
@@ -20933,7 +20933,7 @@
                 </a:solidFill>
                 <a:latin typeface="Consolas"/>
               </a:rPr>
-              <a:t>—</a:t>
+              <a:t>55.94</a:t>
             </a:r>
           </a:p>
         </p:txBody>
@@ -20946,7 +20946,7 @@
         </p:nvSpPr>
         <p:spPr>
           <a:xfrm>
-            <a:off x="9619488" y="3511296"/>
+            <a:off x="9619488" y="3236976"/>
             <a:ext cx="1828800" cy="274320"/>
           </a:xfrm>
           <a:prstGeom prst="rect">
@@ -20978,7 +20978,7 @@
                 </a:solidFill>
                 <a:latin typeface="Consolas"/>
               </a:rPr>
-              <a:t>0.6127</a:t>
+              <a:t>0.7797</a:t>
             </a:r>
           </a:p>
         </p:txBody>
@@ -20991,7 +20991,7 @@
         </p:nvSpPr>
         <p:spPr>
           <a:xfrm>
-            <a:off x="658368" y="3822192"/>
+            <a:off x="658368" y="3547872"/>
             <a:ext cx="10789920" cy="9525"/>
           </a:xfrm>
           <a:prstGeom prst="rect">
@@ -21035,7 +21035,7 @@
         </p:nvSpPr>
         <p:spPr>
           <a:xfrm>
-            <a:off x="658368" y="3913632"/>
+            <a:off x="658368" y="3602736"/>
             <a:ext cx="3200400" cy="274320"/>
           </a:xfrm>
           <a:prstGeom prst="rect">
@@ -21067,7 +21067,7 @@
                 </a:solidFill>
                 <a:latin typeface="Segoe UI"/>
               </a:rPr>
-              <a:t>Cox proportional hazards</a:t>
+              <a:t>Discrete-time hazard</a:t>
             </a:r>
           </a:p>
         </p:txBody>
@@ -21080,7 +21080,7 @@
         </p:nvSpPr>
         <p:spPr>
           <a:xfrm>
-            <a:off x="3858768" y="3913632"/>
+            <a:off x="3858768" y="3602736"/>
             <a:ext cx="2286000" cy="274320"/>
           </a:xfrm>
           <a:prstGeom prst="rect">
@@ -21125,7 +21125,7 @@
         </p:nvSpPr>
         <p:spPr>
           <a:xfrm>
-            <a:off x="6144768" y="3913632"/>
+            <a:off x="6144768" y="3602736"/>
             <a:ext cx="1645920" cy="274320"/>
           </a:xfrm>
           <a:prstGeom prst="rect">
@@ -21170,7 +21170,7 @@
         </p:nvSpPr>
         <p:spPr>
           <a:xfrm>
-            <a:off x="7790688" y="3913632"/>
+            <a:off x="7790688" y="3602736"/>
             <a:ext cx="1828800" cy="274320"/>
           </a:xfrm>
           <a:prstGeom prst="rect">
@@ -21202,7 +21202,7 @@
                 </a:solidFill>
                 <a:latin typeface="Consolas"/>
               </a:rPr>
-              <a:t>c-idx 0.6967</a:t>
+              <a:t>—</a:t>
             </a:r>
           </a:p>
         </p:txBody>
@@ -21215,7 +21215,7 @@
         </p:nvSpPr>
         <p:spPr>
           <a:xfrm>
-            <a:off x="9619488" y="3913632"/>
+            <a:off x="9619488" y="3602736"/>
             <a:ext cx="1828800" cy="274320"/>
           </a:xfrm>
           <a:prstGeom prst="rect">
@@ -21247,7 +21247,7 @@
                 </a:solidFill>
                 <a:latin typeface="Consolas"/>
               </a:rPr>
-              <a:t>—</a:t>
+              <a:t>0.6127</a:t>
             </a:r>
           </a:p>
         </p:txBody>
@@ -21260,7 +21260,7 @@
         </p:nvSpPr>
         <p:spPr>
           <a:xfrm>
-            <a:off x="658368" y="4224528"/>
+            <a:off x="658368" y="3913632"/>
             <a:ext cx="10789920" cy="9525"/>
           </a:xfrm>
           <a:prstGeom prst="rect">
@@ -21298,14 +21298,552 @@
       </p:sp>
       <p:sp>
         <p:nvSpPr>
-          <p:cNvPr id="36" name="Rectangle 35"/>
+          <p:cNvPr id="36" name="TextBox 35"/>
+          <p:cNvSpPr txBox="1"/>
+          <p:nvPr/>
+        </p:nvSpPr>
+        <p:spPr>
+          <a:xfrm>
+            <a:off x="658368" y="3968496"/>
+            <a:ext cx="3200400" cy="274320"/>
+          </a:xfrm>
+          <a:prstGeom prst="rect">
+            <a:avLst/>
+          </a:prstGeom>
+          <a:noFill/>
+        </p:spPr>
+        <p:txBody>
+          <a:bodyPr wrap="square" lIns="0" rIns="0" tIns="0" bIns="0">
+            <a:spAutoFit/>
+          </a:bodyPr>
+          <a:lstStyle/>
+          <a:p>
+            <a:pPr algn="l">
+              <a:lnSpc>
+                <a:spcPct val="100000"/>
+              </a:lnSpc>
+              <a:spcBef>
+                <a:spcPts val="0"/>
+              </a:spcBef>
+              <a:spcAft>
+                <a:spcPts val="0"/>
+              </a:spcAft>
+            </a:pPr>
+            <a:r>
+              <a:rPr sz="1150" b="0">
+                <a:solidFill>
+                  <a:srgbClr val="475467"/>
+                </a:solidFill>
+                <a:latin typeface="Segoe UI"/>
+              </a:rPr>
+              <a:t>Cox survival model</a:t>
+            </a:r>
+          </a:p>
+        </p:txBody>
+      </p:sp>
+      <p:sp>
+        <p:nvSpPr>
+          <p:cNvPr id="37" name="TextBox 36"/>
+          <p:cNvSpPr txBox="1"/>
+          <p:nvPr/>
+        </p:nvSpPr>
+        <p:spPr>
+          <a:xfrm>
+            <a:off x="3858768" y="3968496"/>
+            <a:ext cx="2286000" cy="274320"/>
+          </a:xfrm>
+          <a:prstGeom prst="rect">
+            <a:avLst/>
+          </a:prstGeom>
+          <a:noFill/>
+        </p:spPr>
+        <p:txBody>
+          <a:bodyPr wrap="square" lIns="0" rIns="0" tIns="0" bIns="0">
+            <a:spAutoFit/>
+          </a:bodyPr>
+          <a:lstStyle/>
+          <a:p>
+            <a:pPr algn="l">
+              <a:lnSpc>
+                <a:spcPct val="100000"/>
+              </a:lnSpc>
+              <a:spcBef>
+                <a:spcPts val="0"/>
+              </a:spcBef>
+              <a:spcAft>
+                <a:spcPts val="0"/>
+              </a:spcAft>
+            </a:pPr>
+            <a:r>
+              <a:rPr sz="1150" b="0">
+                <a:solidFill>
+                  <a:srgbClr val="475467"/>
+                </a:solidFill>
+                <a:latin typeface="Segoe UI"/>
+              </a:rPr>
+              <a:t>Fannie Mae panel</a:t>
+            </a:r>
+          </a:p>
+        </p:txBody>
+      </p:sp>
+      <p:sp>
+        <p:nvSpPr>
+          <p:cNvPr id="38" name="TextBox 37"/>
+          <p:cNvSpPr txBox="1"/>
+          <p:nvPr/>
+        </p:nvSpPr>
+        <p:spPr>
+          <a:xfrm>
+            <a:off x="6144768" y="3968496"/>
+            <a:ext cx="1645920" cy="274320"/>
+          </a:xfrm>
+          <a:prstGeom prst="rect">
+            <a:avLst/>
+          </a:prstGeom>
+          <a:noFill/>
+        </p:spPr>
+        <p:txBody>
+          <a:bodyPr wrap="square" lIns="0" rIns="0" tIns="0" bIns="0">
+            <a:spAutoFit/>
+          </a:bodyPr>
+          <a:lstStyle/>
+          <a:p>
+            <a:pPr algn="l">
+              <a:lnSpc>
+                <a:spcPct val="100000"/>
+              </a:lnSpc>
+              <a:spcBef>
+                <a:spcPts val="0"/>
+              </a:spcBef>
+              <a:spcAft>
+                <a:spcPts val="0"/>
+              </a:spcAft>
+            </a:pPr>
+            <a:r>
+              <a:rPr sz="1150" b="0">
+                <a:solidFill>
+                  <a:srgbClr val="101828"/>
+                </a:solidFill>
+                <a:latin typeface="Consolas"/>
+              </a:rPr>
+              <a:t>338,210</a:t>
+            </a:r>
+          </a:p>
+        </p:txBody>
+      </p:sp>
+      <p:sp>
+        <p:nvSpPr>
+          <p:cNvPr id="39" name="TextBox 38"/>
+          <p:cNvSpPr txBox="1"/>
+          <p:nvPr/>
+        </p:nvSpPr>
+        <p:spPr>
+          <a:xfrm>
+            <a:off x="7790688" y="3968496"/>
+            <a:ext cx="1828800" cy="274320"/>
+          </a:xfrm>
+          <a:prstGeom prst="rect">
+            <a:avLst/>
+          </a:prstGeom>
+          <a:noFill/>
+        </p:spPr>
+        <p:txBody>
+          <a:bodyPr wrap="square" lIns="0" rIns="0" tIns="0" bIns="0">
+            <a:spAutoFit/>
+          </a:bodyPr>
+          <a:lstStyle/>
+          <a:p>
+            <a:pPr algn="l">
+              <a:lnSpc>
+                <a:spcPct val="100000"/>
+              </a:lnSpc>
+              <a:spcBef>
+                <a:spcPts val="0"/>
+              </a:spcBef>
+              <a:spcAft>
+                <a:spcPts val="0"/>
+              </a:spcAft>
+            </a:pPr>
+            <a:r>
+              <a:rPr sz="1150" b="0">
+                <a:solidFill>
+                  <a:srgbClr val="101828"/>
+                </a:solidFill>
+                <a:latin typeface="Consolas"/>
+              </a:rPr>
+              <a:t>c-idx 0.6967</a:t>
+            </a:r>
+          </a:p>
+        </p:txBody>
+      </p:sp>
+      <p:sp>
+        <p:nvSpPr>
+          <p:cNvPr id="40" name="TextBox 39"/>
+          <p:cNvSpPr txBox="1"/>
+          <p:nvPr/>
+        </p:nvSpPr>
+        <p:spPr>
+          <a:xfrm>
+            <a:off x="9619488" y="3968496"/>
+            <a:ext cx="1828800" cy="274320"/>
+          </a:xfrm>
+          <a:prstGeom prst="rect">
+            <a:avLst/>
+          </a:prstGeom>
+          <a:noFill/>
+        </p:spPr>
+        <p:txBody>
+          <a:bodyPr wrap="square" lIns="0" rIns="0" tIns="0" bIns="0">
+            <a:spAutoFit/>
+          </a:bodyPr>
+          <a:lstStyle/>
+          <a:p>
+            <a:pPr algn="l">
+              <a:lnSpc>
+                <a:spcPct val="100000"/>
+              </a:lnSpc>
+              <a:spcBef>
+                <a:spcPts val="0"/>
+              </a:spcBef>
+              <a:spcAft>
+                <a:spcPts val="0"/>
+              </a:spcAft>
+            </a:pPr>
+            <a:r>
+              <a:rPr sz="1150" b="0">
+                <a:solidFill>
+                  <a:srgbClr val="101828"/>
+                </a:solidFill>
+                <a:latin typeface="Consolas"/>
+              </a:rPr>
+              <a:t>—</a:t>
+            </a:r>
+          </a:p>
+        </p:txBody>
+      </p:sp>
+      <p:sp>
+        <p:nvSpPr>
+          <p:cNvPr id="41" name="Rectangle 40"/>
           <p:cNvSpPr/>
           <p:nvPr/>
         </p:nvSpPr>
         <p:spPr>
           <a:xfrm>
-            <a:off x="658368" y="4480560"/>
-            <a:ext cx="10881360" cy="868680"/>
+            <a:off x="658368" y="4279392"/>
+            <a:ext cx="10789920" cy="9525"/>
+          </a:xfrm>
+          <a:prstGeom prst="rect">
+            <a:avLst/>
+          </a:prstGeom>
+          <a:solidFill>
+            <a:srgbClr val="DBE3EC"/>
+          </a:solidFill>
+          <a:ln>
+            <a:noFill/>
+          </a:ln>
+          <a:effectLst/>
+        </p:spPr>
+        <p:style>
+          <a:lnRef idx="1">
+            <a:schemeClr val="accent1"/>
+          </a:lnRef>
+          <a:fillRef idx="3">
+            <a:schemeClr val="accent1"/>
+          </a:fillRef>
+          <a:effectRef idx="2">
+            <a:schemeClr val="accent1"/>
+          </a:effectRef>
+          <a:fontRef idx="minor">
+            <a:schemeClr val="lt1"/>
+          </a:fontRef>
+        </p:style>
+        <p:txBody>
+          <a:bodyPr rtlCol="0" anchor="ctr" wrap="square"/>
+          <a:lstStyle/>
+          <a:p>
+            <a:pPr algn="ctr"/>
+          </a:p>
+        </p:txBody>
+      </p:sp>
+      <p:sp>
+        <p:nvSpPr>
+          <p:cNvPr id="42" name="TextBox 41"/>
+          <p:cNvSpPr txBox="1"/>
+          <p:nvPr/>
+        </p:nvSpPr>
+        <p:spPr>
+          <a:xfrm>
+            <a:off x="658368" y="4334256"/>
+            <a:ext cx="3200400" cy="274320"/>
+          </a:xfrm>
+          <a:prstGeom prst="rect">
+            <a:avLst/>
+          </a:prstGeom>
+          <a:noFill/>
+        </p:spPr>
+        <p:txBody>
+          <a:bodyPr wrap="square" lIns="0" rIns="0" tIns="0" bIns="0">
+            <a:spAutoFit/>
+          </a:bodyPr>
+          <a:lstStyle/>
+          <a:p>
+            <a:pPr algn="l">
+              <a:lnSpc>
+                <a:spcPct val="100000"/>
+              </a:lnSpc>
+              <a:spcBef>
+                <a:spcPts val="0"/>
+              </a:spcBef>
+              <a:spcAft>
+                <a:spcPts val="0"/>
+              </a:spcAft>
+            </a:pPr>
+            <a:r>
+              <a:rPr sz="1150" b="0">
+                <a:solidFill>
+                  <a:srgbClr val="475467"/>
+                </a:solidFill>
+                <a:latin typeface="Segoe UI"/>
+              </a:rPr>
+              <a:t>Behaviour model, 12-month view</a:t>
+            </a:r>
+          </a:p>
+        </p:txBody>
+      </p:sp>
+      <p:sp>
+        <p:nvSpPr>
+          <p:cNvPr id="43" name="TextBox 42"/>
+          <p:cNvSpPr txBox="1"/>
+          <p:nvPr/>
+        </p:nvSpPr>
+        <p:spPr>
+          <a:xfrm>
+            <a:off x="3858768" y="4334256"/>
+            <a:ext cx="2286000" cy="274320"/>
+          </a:xfrm>
+          <a:prstGeom prst="rect">
+            <a:avLst/>
+          </a:prstGeom>
+          <a:noFill/>
+        </p:spPr>
+        <p:txBody>
+          <a:bodyPr wrap="square" lIns="0" rIns="0" tIns="0" bIns="0">
+            <a:spAutoFit/>
+          </a:bodyPr>
+          <a:lstStyle/>
+          <a:p>
+            <a:pPr algn="l">
+              <a:lnSpc>
+                <a:spcPct val="100000"/>
+              </a:lnSpc>
+              <a:spcBef>
+                <a:spcPts val="0"/>
+              </a:spcBef>
+              <a:spcAft>
+                <a:spcPts val="0"/>
+              </a:spcAft>
+            </a:pPr>
+            <a:r>
+              <a:rPr sz="1150" b="0">
+                <a:solidFill>
+                  <a:srgbClr val="475467"/>
+                </a:solidFill>
+                <a:latin typeface="Segoe UI"/>
+              </a:rPr>
+              <a:t>Fannie Mae panel</a:t>
+            </a:r>
+          </a:p>
+        </p:txBody>
+      </p:sp>
+      <p:sp>
+        <p:nvSpPr>
+          <p:cNvPr id="44" name="TextBox 43"/>
+          <p:cNvSpPr txBox="1"/>
+          <p:nvPr/>
+        </p:nvSpPr>
+        <p:spPr>
+          <a:xfrm>
+            <a:off x="6144768" y="4334256"/>
+            <a:ext cx="1645920" cy="274320"/>
+          </a:xfrm>
+          <a:prstGeom prst="rect">
+            <a:avLst/>
+          </a:prstGeom>
+          <a:noFill/>
+        </p:spPr>
+        <p:txBody>
+          <a:bodyPr wrap="square" lIns="0" rIns="0" tIns="0" bIns="0">
+            <a:spAutoFit/>
+          </a:bodyPr>
+          <a:lstStyle/>
+          <a:p>
+            <a:pPr algn="l">
+              <a:lnSpc>
+                <a:spcPct val="100000"/>
+              </a:lnSpc>
+              <a:spcBef>
+                <a:spcPts val="0"/>
+              </a:spcBef>
+              <a:spcAft>
+                <a:spcPts val="0"/>
+              </a:spcAft>
+            </a:pPr>
+            <a:r>
+              <a:rPr sz="1150" b="0">
+                <a:solidFill>
+                  <a:srgbClr val="101828"/>
+                </a:solidFill>
+                <a:latin typeface="Consolas"/>
+              </a:rPr>
+              <a:t>230,543</a:t>
+            </a:r>
+          </a:p>
+        </p:txBody>
+      </p:sp>
+      <p:sp>
+        <p:nvSpPr>
+          <p:cNvPr id="45" name="TextBox 44"/>
+          <p:cNvSpPr txBox="1"/>
+          <p:nvPr/>
+        </p:nvSpPr>
+        <p:spPr>
+          <a:xfrm>
+            <a:off x="7790688" y="4334256"/>
+            <a:ext cx="1828800" cy="274320"/>
+          </a:xfrm>
+          <a:prstGeom prst="rect">
+            <a:avLst/>
+          </a:prstGeom>
+          <a:noFill/>
+        </p:spPr>
+        <p:txBody>
+          <a:bodyPr wrap="square" lIns="0" rIns="0" tIns="0" bIns="0">
+            <a:spAutoFit/>
+          </a:bodyPr>
+          <a:lstStyle/>
+          <a:p>
+            <a:pPr algn="l">
+              <a:lnSpc>
+                <a:spcPct val="100000"/>
+              </a:lnSpc>
+              <a:spcBef>
+                <a:spcPts val="0"/>
+              </a:spcBef>
+              <a:spcAft>
+                <a:spcPts val="0"/>
+              </a:spcAft>
+            </a:pPr>
+            <a:r>
+              <a:rPr sz="1150" b="0">
+                <a:solidFill>
+                  <a:srgbClr val="101828"/>
+                </a:solidFill>
+                <a:latin typeface="Consolas"/>
+              </a:rPr>
+              <a:t>76.35</a:t>
+            </a:r>
+          </a:p>
+        </p:txBody>
+      </p:sp>
+      <p:sp>
+        <p:nvSpPr>
+          <p:cNvPr id="46" name="TextBox 45"/>
+          <p:cNvSpPr txBox="1"/>
+          <p:nvPr/>
+        </p:nvSpPr>
+        <p:spPr>
+          <a:xfrm>
+            <a:off x="9619488" y="4334256"/>
+            <a:ext cx="1828800" cy="274320"/>
+          </a:xfrm>
+          <a:prstGeom prst="rect">
+            <a:avLst/>
+          </a:prstGeom>
+          <a:noFill/>
+        </p:spPr>
+        <p:txBody>
+          <a:bodyPr wrap="square" lIns="0" rIns="0" tIns="0" bIns="0">
+            <a:spAutoFit/>
+          </a:bodyPr>
+          <a:lstStyle/>
+          <a:p>
+            <a:pPr algn="l">
+              <a:lnSpc>
+                <a:spcPct val="100000"/>
+              </a:lnSpc>
+              <a:spcBef>
+                <a:spcPts val="0"/>
+              </a:spcBef>
+              <a:spcAft>
+                <a:spcPts val="0"/>
+              </a:spcAft>
+            </a:pPr>
+            <a:r>
+              <a:rPr sz="1150" b="0">
+                <a:solidFill>
+                  <a:srgbClr val="101828"/>
+                </a:solidFill>
+                <a:latin typeface="Consolas"/>
+              </a:rPr>
+              <a:t>0.8818</a:t>
+            </a:r>
+          </a:p>
+        </p:txBody>
+      </p:sp>
+      <p:sp>
+        <p:nvSpPr>
+          <p:cNvPr id="47" name="Rectangle 46"/>
+          <p:cNvSpPr/>
+          <p:nvPr/>
+        </p:nvSpPr>
+        <p:spPr>
+          <a:xfrm>
+            <a:off x="658368" y="4645152"/>
+            <a:ext cx="10789920" cy="9525"/>
+          </a:xfrm>
+          <a:prstGeom prst="rect">
+            <a:avLst/>
+          </a:prstGeom>
+          <a:solidFill>
+            <a:srgbClr val="DBE3EC"/>
+          </a:solidFill>
+          <a:ln>
+            <a:noFill/>
+          </a:ln>
+          <a:effectLst/>
+        </p:spPr>
+        <p:style>
+          <a:lnRef idx="1">
+            <a:schemeClr val="accent1"/>
+          </a:lnRef>
+          <a:fillRef idx="3">
+            <a:schemeClr val="accent1"/>
+          </a:fillRef>
+          <a:effectRef idx="2">
+            <a:schemeClr val="accent1"/>
+          </a:effectRef>
+          <a:fontRef idx="minor">
+            <a:schemeClr val="lt1"/>
+          </a:fontRef>
+        </p:style>
+        <p:txBody>
+          <a:bodyPr rtlCol="0" anchor="ctr" wrap="square"/>
+          <a:lstStyle/>
+          <a:p>
+            <a:pPr algn="ctr"/>
+          </a:p>
+        </p:txBody>
+      </p:sp>
+      <p:sp>
+        <p:nvSpPr>
+          <p:cNvPr id="48" name="Rectangle 47"/>
+          <p:cNvSpPr/>
+          <p:nvPr/>
+        </p:nvSpPr>
+        <p:spPr>
+          <a:xfrm>
+            <a:off x="658368" y="4828032"/>
+            <a:ext cx="10881360" cy="603504"/>
           </a:xfrm>
           <a:prstGeom prst="rect">
             <a:avLst/>
@@ -21342,14 +21880,14 @@
       </p:sp>
       <p:sp>
         <p:nvSpPr>
-          <p:cNvPr id="37" name="Rectangle 36"/>
+          <p:cNvPr id="49" name="Rectangle 48"/>
           <p:cNvSpPr/>
           <p:nvPr/>
         </p:nvSpPr>
         <p:spPr>
           <a:xfrm>
-            <a:off x="658368" y="4480560"/>
-            <a:ext cx="36576" cy="868680"/>
+            <a:off x="658368" y="4828032"/>
+            <a:ext cx="36576" cy="603504"/>
           </a:xfrm>
           <a:prstGeom prst="rect">
             <a:avLst/>
@@ -21386,14 +21924,14 @@
       </p:sp>
       <p:sp>
         <p:nvSpPr>
-          <p:cNvPr id="38" name="TextBox 37"/>
-          <p:cNvSpPr txBox="1"/>
-          <p:nvPr/>
-        </p:nvSpPr>
-        <p:spPr>
-          <a:xfrm>
-            <a:off x="859536" y="4599432"/>
-            <a:ext cx="10497312" cy="630936"/>
+          <p:cNvPr id="50" name="TextBox 49"/>
+          <p:cNvSpPr txBox="1"/>
+          <p:nvPr/>
+        </p:nvSpPr>
+        <p:spPr>
+          <a:xfrm>
+            <a:off x="859536" y="4946904"/>
+            <a:ext cx="10497312" cy="365760"/>
           </a:xfrm>
           <a:prstGeom prst="rect">
             <a:avLst/>
@@ -21424,21 +21962,21 @@
                 </a:solidFill>
                 <a:latin typeface="Segoe UI"/>
               </a:rPr>
-              <a:t>The stronger model scores 57.79 on data it learned from and 51.94 on data it had never seen. We report that gap instead of hiding it — a model that scores the same on both has usually been over-tuned.</a:t>
-            </a:r>
-          </a:p>
-        </p:txBody>
-      </p:sp>
-      <p:sp>
-        <p:nvSpPr>
-          <p:cNvPr id="39" name="Rectangle 38"/>
+              <a:t>The bottom row of each pair is a later, stronger run using more data and more models. The earlier rows are kept rather than replaced, because a baseline you deleted is a baseline nobody can check.</a:t>
+            </a:r>
+          </a:p>
+        </p:txBody>
+      </p:sp>
+      <p:sp>
+        <p:nvSpPr>
+          <p:cNvPr id="51" name="Rectangle 50"/>
           <p:cNvSpPr/>
           <p:nvPr/>
         </p:nvSpPr>
         <p:spPr>
           <a:xfrm>
-            <a:off x="658368" y="5532120"/>
-            <a:ext cx="10881360" cy="685800"/>
+            <a:off x="658368" y="5559552"/>
+            <a:ext cx="10881360" cy="603504"/>
           </a:xfrm>
           <a:prstGeom prst="rect">
             <a:avLst/>
@@ -21475,14 +22013,14 @@
       </p:sp>
       <p:sp>
         <p:nvSpPr>
-          <p:cNvPr id="40" name="Rectangle 39"/>
+          <p:cNvPr id="52" name="Rectangle 51"/>
           <p:cNvSpPr/>
           <p:nvPr/>
         </p:nvSpPr>
         <p:spPr>
           <a:xfrm>
-            <a:off x="658368" y="5532120"/>
-            <a:ext cx="36576" cy="685800"/>
+            <a:off x="658368" y="5559552"/>
+            <a:ext cx="36576" cy="603504"/>
           </a:xfrm>
           <a:prstGeom prst="rect">
             <a:avLst/>
@@ -21519,14 +22057,14 @@
       </p:sp>
       <p:sp>
         <p:nvSpPr>
-          <p:cNvPr id="41" name="TextBox 40"/>
-          <p:cNvSpPr txBox="1"/>
-          <p:nvPr/>
-        </p:nvSpPr>
-        <p:spPr>
-          <a:xfrm>
-            <a:off x="859536" y="5650992"/>
-            <a:ext cx="10497312" cy="448056"/>
+          <p:cNvPr id="53" name="TextBox 52"/>
+          <p:cNvSpPr txBox="1"/>
+          <p:nvPr/>
+        </p:nvSpPr>
+        <p:spPr>
+          <a:xfrm>
+            <a:off x="859536" y="5678424"/>
+            <a:ext cx="10497312" cy="365760"/>
           </a:xfrm>
           <a:prstGeom prst="rect">
             <a:avLst/>
@@ -21557,7 +22095,7 @@
                 </a:solidFill>
                 <a:latin typeface="Segoe UI"/>
               </a:rPr>
-              <a:t>These come from real public loan data, not this bank's customers. They prove the software works. They are not proof about this book.</a:t>
+              <a:t>These come from real public loan data — US mortgages and consumer credit — not this bank's customers. They prove the software works. They are not proof about this book.</a:t>
             </a:r>
           </a:p>
         </p:txBody>
@@ -21918,7 +22456,7 @@
                 </a:solidFill>
                 <a:latin typeface="Segoe UI"/>
               </a:rPr>
-              <a:t>We corrected our own mistake here. The first run said 11%. It turned out 726 of 827 defaults happened before the system had any data to look at — we were measuring the calendar, not the model. Counting only reachable cases moved the answer eight-fold.</a:t>
+              <a:t>We corrected our own mistake here. The first run said 11%. It turned out 726 of 827 defaults happened before the system had any data to look at — we were measuring the calendar, not the model. A later, stronger detector on the full panel now catches 61% of defaults a typical 8 months early.</a:t>
             </a:r>
           </a:p>
         </p:txBody>

--- a/Lending_Hub_EPIC_8.pptx
+++ b/Lending_Hub_EPIC_8.pptx
@@ -19946,7 +19946,7 @@
                 </a:solidFill>
                 <a:latin typeface="Segoe UI"/>
               </a:rPr>
-              <a:t>Two full pipelines run end to end on real datasets: 150,000 real credit applications, and a 19-year mortgage panel of 16.8 million performance rows.</a:t>
+              <a:t>Every model family with data behind it, trained on real public datasets.</a:t>
             </a:r>
           </a:p>
         </p:txBody>
@@ -19959,7 +19959,7 @@
         </p:nvSpPr>
         <p:spPr>
           <a:xfrm>
-            <a:off x="658368" y="2121408"/>
+            <a:off x="658368" y="2029968"/>
             <a:ext cx="3200400" cy="228600"/>
           </a:xfrm>
           <a:prstGeom prst="rect">
@@ -20004,7 +20004,7 @@
         </p:nvSpPr>
         <p:spPr>
           <a:xfrm>
-            <a:off x="3858768" y="2121408"/>
+            <a:off x="3858768" y="2029968"/>
             <a:ext cx="2286000" cy="228600"/>
           </a:xfrm>
           <a:prstGeom prst="rect">
@@ -20049,7 +20049,7 @@
         </p:nvSpPr>
         <p:spPr>
           <a:xfrm>
-            <a:off x="6144768" y="2121408"/>
+            <a:off x="6144768" y="2029968"/>
             <a:ext cx="1645920" cy="228600"/>
           </a:xfrm>
           <a:prstGeom prst="rect">
@@ -20094,7 +20094,7 @@
         </p:nvSpPr>
         <p:spPr>
           <a:xfrm>
-            <a:off x="7790688" y="2121408"/>
+            <a:off x="7790688" y="2029968"/>
             <a:ext cx="1828800" cy="228600"/>
           </a:xfrm>
           <a:prstGeom prst="rect">
@@ -20139,7 +20139,7 @@
         </p:nvSpPr>
         <p:spPr>
           <a:xfrm>
-            <a:off x="9619488" y="2121408"/>
+            <a:off x="9619488" y="2029968"/>
             <a:ext cx="1828800" cy="228600"/>
           </a:xfrm>
           <a:prstGeom prst="rect">
@@ -20184,7 +20184,7 @@
         </p:nvSpPr>
         <p:spPr>
           <a:xfrm>
-            <a:off x="658368" y="2395728"/>
+            <a:off x="658368" y="2304288"/>
             <a:ext cx="10789920" cy="12700"/>
           </a:xfrm>
           <a:prstGeom prst="rect">
@@ -20228,7 +20228,7 @@
         </p:nvSpPr>
         <p:spPr>
           <a:xfrm>
-            <a:off x="658368" y="2505456"/>
+            <a:off x="658368" y="2377440"/>
             <a:ext cx="3200400" cy="274320"/>
           </a:xfrm>
           <a:prstGeom prst="rect">
@@ -20273,7 +20273,7 @@
         </p:nvSpPr>
         <p:spPr>
           <a:xfrm>
-            <a:off x="3858768" y="2505456"/>
+            <a:off x="3858768" y="2377440"/>
             <a:ext cx="2286000" cy="274320"/>
           </a:xfrm>
           <a:prstGeom prst="rect">
@@ -20318,7 +20318,7 @@
         </p:nvSpPr>
         <p:spPr>
           <a:xfrm>
-            <a:off x="6144768" y="2505456"/>
+            <a:off x="6144768" y="2377440"/>
             <a:ext cx="1645920" cy="274320"/>
           </a:xfrm>
           <a:prstGeom prst="rect">
@@ -20363,7 +20363,7 @@
         </p:nvSpPr>
         <p:spPr>
           <a:xfrm>
-            <a:off x="7790688" y="2505456"/>
+            <a:off x="7790688" y="2377440"/>
             <a:ext cx="1828800" cy="274320"/>
           </a:xfrm>
           <a:prstGeom prst="rect">
@@ -20408,7 +20408,7 @@
         </p:nvSpPr>
         <p:spPr>
           <a:xfrm>
-            <a:off x="9619488" y="2505456"/>
+            <a:off x="9619488" y="2377440"/>
             <a:ext cx="1828800" cy="274320"/>
           </a:xfrm>
           <a:prstGeom prst="rect">
@@ -20453,7 +20453,7 @@
         </p:nvSpPr>
         <p:spPr>
           <a:xfrm>
-            <a:off x="658368" y="2816352"/>
+            <a:off x="658368" y="2688336"/>
             <a:ext cx="10789920" cy="9525"/>
           </a:xfrm>
           <a:prstGeom prst="rect">
@@ -20497,7 +20497,7 @@
         </p:nvSpPr>
         <p:spPr>
           <a:xfrm>
-            <a:off x="658368" y="2871216"/>
+            <a:off x="658368" y="2692908"/>
             <a:ext cx="3200400" cy="274320"/>
           </a:xfrm>
           <a:prstGeom prst="rect">
@@ -20542,7 +20542,7 @@
         </p:nvSpPr>
         <p:spPr>
           <a:xfrm>
-            <a:off x="3858768" y="2871216"/>
+            <a:off x="3858768" y="2692908"/>
             <a:ext cx="2286000" cy="274320"/>
           </a:xfrm>
           <a:prstGeom prst="rect">
@@ -20587,7 +20587,7 @@
         </p:nvSpPr>
         <p:spPr>
           <a:xfrm>
-            <a:off x="6144768" y="2871216"/>
+            <a:off x="6144768" y="2692908"/>
             <a:ext cx="1645920" cy="274320"/>
           </a:xfrm>
           <a:prstGeom prst="rect">
@@ -20632,7 +20632,7 @@
         </p:nvSpPr>
         <p:spPr>
           <a:xfrm>
-            <a:off x="7790688" y="2871216"/>
+            <a:off x="7790688" y="2692908"/>
             <a:ext cx="1828800" cy="274320"/>
           </a:xfrm>
           <a:prstGeom prst="rect">
@@ -20677,7 +20677,7 @@
         </p:nvSpPr>
         <p:spPr>
           <a:xfrm>
-            <a:off x="9619488" y="2871216"/>
+            <a:off x="9619488" y="2692908"/>
             <a:ext cx="1828800" cy="274320"/>
           </a:xfrm>
           <a:prstGeom prst="rect">
@@ -20722,7 +20722,7 @@
         </p:nvSpPr>
         <p:spPr>
           <a:xfrm>
-            <a:off x="658368" y="3182112"/>
+            <a:off x="658368" y="3003804"/>
             <a:ext cx="10789920" cy="9525"/>
           </a:xfrm>
           <a:prstGeom prst="rect">
@@ -20766,7 +20766,7 @@
         </p:nvSpPr>
         <p:spPr>
           <a:xfrm>
-            <a:off x="658368" y="3236976"/>
+            <a:off x="658368" y="3008376"/>
             <a:ext cx="3200400" cy="274320"/>
           </a:xfrm>
           <a:prstGeom prst="rect">
@@ -20811,7 +20811,7 @@
         </p:nvSpPr>
         <p:spPr>
           <a:xfrm>
-            <a:off x="3858768" y="3236976"/>
+            <a:off x="3858768" y="3008376"/>
             <a:ext cx="2286000" cy="274320"/>
           </a:xfrm>
           <a:prstGeom prst="rect">
@@ -20856,7 +20856,7 @@
         </p:nvSpPr>
         <p:spPr>
           <a:xfrm>
-            <a:off x="6144768" y="3236976"/>
+            <a:off x="6144768" y="3008376"/>
             <a:ext cx="1645920" cy="274320"/>
           </a:xfrm>
           <a:prstGeom prst="rect">
@@ -20901,7 +20901,7 @@
         </p:nvSpPr>
         <p:spPr>
           <a:xfrm>
-            <a:off x="7790688" y="3236976"/>
+            <a:off x="7790688" y="3008376"/>
             <a:ext cx="1828800" cy="274320"/>
           </a:xfrm>
           <a:prstGeom prst="rect">
@@ -20946,7 +20946,7 @@
         </p:nvSpPr>
         <p:spPr>
           <a:xfrm>
-            <a:off x="9619488" y="3236976"/>
+            <a:off x="9619488" y="3008376"/>
             <a:ext cx="1828800" cy="274320"/>
           </a:xfrm>
           <a:prstGeom prst="rect">
@@ -20991,7 +20991,7 @@
         </p:nvSpPr>
         <p:spPr>
           <a:xfrm>
-            <a:off x="658368" y="3547872"/>
+            <a:off x="658368" y="3319272"/>
             <a:ext cx="10789920" cy="9525"/>
           </a:xfrm>
           <a:prstGeom prst="rect">
@@ -21035,7 +21035,7 @@
         </p:nvSpPr>
         <p:spPr>
           <a:xfrm>
-            <a:off x="658368" y="3602736"/>
+            <a:off x="658368" y="3323844"/>
             <a:ext cx="3200400" cy="274320"/>
           </a:xfrm>
           <a:prstGeom prst="rect">
@@ -21080,7 +21080,7 @@
         </p:nvSpPr>
         <p:spPr>
           <a:xfrm>
-            <a:off x="3858768" y="3602736"/>
+            <a:off x="3858768" y="3323844"/>
             <a:ext cx="2286000" cy="274320"/>
           </a:xfrm>
           <a:prstGeom prst="rect">
@@ -21125,7 +21125,7 @@
         </p:nvSpPr>
         <p:spPr>
           <a:xfrm>
-            <a:off x="6144768" y="3602736"/>
+            <a:off x="6144768" y="3323844"/>
             <a:ext cx="1645920" cy="274320"/>
           </a:xfrm>
           <a:prstGeom prst="rect">
@@ -21170,7 +21170,7 @@
         </p:nvSpPr>
         <p:spPr>
           <a:xfrm>
-            <a:off x="7790688" y="3602736"/>
+            <a:off x="7790688" y="3323844"/>
             <a:ext cx="1828800" cy="274320"/>
           </a:xfrm>
           <a:prstGeom prst="rect">
@@ -21215,7 +21215,7 @@
         </p:nvSpPr>
         <p:spPr>
           <a:xfrm>
-            <a:off x="9619488" y="3602736"/>
+            <a:off x="9619488" y="3323844"/>
             <a:ext cx="1828800" cy="274320"/>
           </a:xfrm>
           <a:prstGeom prst="rect">
@@ -21260,7 +21260,7 @@
         </p:nvSpPr>
         <p:spPr>
           <a:xfrm>
-            <a:off x="658368" y="3913632"/>
+            <a:off x="658368" y="3634740"/>
             <a:ext cx="10789920" cy="9525"/>
           </a:xfrm>
           <a:prstGeom prst="rect">
@@ -21304,7 +21304,7 @@
         </p:nvSpPr>
         <p:spPr>
           <a:xfrm>
-            <a:off x="658368" y="3968496"/>
+            <a:off x="658368" y="3639312"/>
             <a:ext cx="3200400" cy="274320"/>
           </a:xfrm>
           <a:prstGeom prst="rect">
@@ -21349,7 +21349,7 @@
         </p:nvSpPr>
         <p:spPr>
           <a:xfrm>
-            <a:off x="3858768" y="3968496"/>
+            <a:off x="3858768" y="3639312"/>
             <a:ext cx="2286000" cy="274320"/>
           </a:xfrm>
           <a:prstGeom prst="rect">
@@ -21394,7 +21394,7 @@
         </p:nvSpPr>
         <p:spPr>
           <a:xfrm>
-            <a:off x="6144768" y="3968496"/>
+            <a:off x="6144768" y="3639312"/>
             <a:ext cx="1645920" cy="274320"/>
           </a:xfrm>
           <a:prstGeom prst="rect">
@@ -21439,7 +21439,7 @@
         </p:nvSpPr>
         <p:spPr>
           <a:xfrm>
-            <a:off x="7790688" y="3968496"/>
+            <a:off x="7790688" y="3639312"/>
             <a:ext cx="1828800" cy="274320"/>
           </a:xfrm>
           <a:prstGeom prst="rect">
@@ -21484,7 +21484,7 @@
         </p:nvSpPr>
         <p:spPr>
           <a:xfrm>
-            <a:off x="9619488" y="3968496"/>
+            <a:off x="9619488" y="3639312"/>
             <a:ext cx="1828800" cy="274320"/>
           </a:xfrm>
           <a:prstGeom prst="rect">
@@ -21529,7 +21529,7 @@
         </p:nvSpPr>
         <p:spPr>
           <a:xfrm>
-            <a:off x="658368" y="4279392"/>
+            <a:off x="658368" y="3950208"/>
             <a:ext cx="10789920" cy="9525"/>
           </a:xfrm>
           <a:prstGeom prst="rect">
@@ -21573,7 +21573,7 @@
         </p:nvSpPr>
         <p:spPr>
           <a:xfrm>
-            <a:off x="658368" y="4334256"/>
+            <a:off x="658368" y="3954780"/>
             <a:ext cx="3200400" cy="274320"/>
           </a:xfrm>
           <a:prstGeom prst="rect">
@@ -21618,7 +21618,7 @@
         </p:nvSpPr>
         <p:spPr>
           <a:xfrm>
-            <a:off x="3858768" y="4334256"/>
+            <a:off x="3858768" y="3954780"/>
             <a:ext cx="2286000" cy="274320"/>
           </a:xfrm>
           <a:prstGeom prst="rect">
@@ -21663,7 +21663,7 @@
         </p:nvSpPr>
         <p:spPr>
           <a:xfrm>
-            <a:off x="6144768" y="4334256"/>
+            <a:off x="6144768" y="3954780"/>
             <a:ext cx="1645920" cy="274320"/>
           </a:xfrm>
           <a:prstGeom prst="rect">
@@ -21708,7 +21708,7 @@
         </p:nvSpPr>
         <p:spPr>
           <a:xfrm>
-            <a:off x="7790688" y="4334256"/>
+            <a:off x="7790688" y="3954780"/>
             <a:ext cx="1828800" cy="274320"/>
           </a:xfrm>
           <a:prstGeom prst="rect">
@@ -21753,7 +21753,7 @@
         </p:nvSpPr>
         <p:spPr>
           <a:xfrm>
-            <a:off x="9619488" y="4334256"/>
+            <a:off x="9619488" y="3954780"/>
             <a:ext cx="1828800" cy="274320"/>
           </a:xfrm>
           <a:prstGeom prst="rect">
@@ -21798,7 +21798,7 @@
         </p:nvSpPr>
         <p:spPr>
           <a:xfrm>
-            <a:off x="658368" y="4645152"/>
+            <a:off x="658368" y="4265676"/>
             <a:ext cx="10789920" cy="9525"/>
           </a:xfrm>
           <a:prstGeom prst="rect">
@@ -21836,14 +21836,552 @@
       </p:sp>
       <p:sp>
         <p:nvSpPr>
-          <p:cNvPr id="48" name="Rectangle 47"/>
+          <p:cNvPr id="48" name="TextBox 47"/>
+          <p:cNvSpPr txBox="1"/>
+          <p:nvPr/>
+        </p:nvSpPr>
+        <p:spPr>
+          <a:xfrm>
+            <a:off x="658368" y="4270248"/>
+            <a:ext cx="3200400" cy="274320"/>
+          </a:xfrm>
+          <a:prstGeom prst="rect">
+            <a:avLst/>
+          </a:prstGeom>
+          <a:noFill/>
+        </p:spPr>
+        <p:txBody>
+          <a:bodyPr wrap="square" lIns="0" rIns="0" tIns="0" bIns="0">
+            <a:spAutoFit/>
+          </a:bodyPr>
+          <a:lstStyle/>
+          <a:p>
+            <a:pPr algn="l">
+              <a:lnSpc>
+                <a:spcPct val="100000"/>
+              </a:lnSpc>
+              <a:spcBef>
+                <a:spcPts val="0"/>
+              </a:spcBef>
+              <a:spcAft>
+                <a:spcPts val="0"/>
+              </a:spcAft>
+            </a:pPr>
+            <a:r>
+              <a:rPr sz="1150" b="0">
+                <a:solidFill>
+                  <a:srgbClr val="475467"/>
+                </a:solidFill>
+                <a:latin typeface="Segoe UI"/>
+              </a:rPr>
+              <a:t>Fraud, 3-model ensemble</a:t>
+            </a:r>
+          </a:p>
+        </p:txBody>
+      </p:sp>
+      <p:sp>
+        <p:nvSpPr>
+          <p:cNvPr id="49" name="TextBox 48"/>
+          <p:cNvSpPr txBox="1"/>
+          <p:nvPr/>
+        </p:nvSpPr>
+        <p:spPr>
+          <a:xfrm>
+            <a:off x="3858768" y="4270248"/>
+            <a:ext cx="2286000" cy="274320"/>
+          </a:xfrm>
+          <a:prstGeom prst="rect">
+            <a:avLst/>
+          </a:prstGeom>
+          <a:noFill/>
+        </p:spPr>
+        <p:txBody>
+          <a:bodyPr wrap="square" lIns="0" rIns="0" tIns="0" bIns="0">
+            <a:spAutoFit/>
+          </a:bodyPr>
+          <a:lstStyle/>
+          <a:p>
+            <a:pPr algn="l">
+              <a:lnSpc>
+                <a:spcPct val="100000"/>
+              </a:lnSpc>
+              <a:spcBef>
+                <a:spcPts val="0"/>
+              </a:spcBef>
+              <a:spcAft>
+                <a:spcPts val="0"/>
+              </a:spcAft>
+            </a:pPr>
+            <a:r>
+              <a:rPr sz="1150" b="0">
+                <a:solidFill>
+                  <a:srgbClr val="475467"/>
+                </a:solidFill>
+                <a:latin typeface="Segoe UI"/>
+              </a:rPr>
+              <a:t>IEEE-CIS</a:t>
+            </a:r>
+          </a:p>
+        </p:txBody>
+      </p:sp>
+      <p:sp>
+        <p:nvSpPr>
+          <p:cNvPr id="50" name="TextBox 49"/>
+          <p:cNvSpPr txBox="1"/>
+          <p:nvPr/>
+        </p:nvSpPr>
+        <p:spPr>
+          <a:xfrm>
+            <a:off x="6144768" y="4270248"/>
+            <a:ext cx="1645920" cy="274320"/>
+          </a:xfrm>
+          <a:prstGeom prst="rect">
+            <a:avLst/>
+          </a:prstGeom>
+          <a:noFill/>
+        </p:spPr>
+        <p:txBody>
+          <a:bodyPr wrap="square" lIns="0" rIns="0" tIns="0" bIns="0">
+            <a:spAutoFit/>
+          </a:bodyPr>
+          <a:lstStyle/>
+          <a:p>
+            <a:pPr algn="l">
+              <a:lnSpc>
+                <a:spcPct val="100000"/>
+              </a:lnSpc>
+              <a:spcBef>
+                <a:spcPts val="0"/>
+              </a:spcBef>
+              <a:spcAft>
+                <a:spcPts val="0"/>
+              </a:spcAft>
+            </a:pPr>
+            <a:r>
+              <a:rPr sz="1150" b="0">
+                <a:solidFill>
+                  <a:srgbClr val="101828"/>
+                </a:solidFill>
+                <a:latin typeface="Consolas"/>
+              </a:rPr>
+              <a:t>590,540</a:t>
+            </a:r>
+          </a:p>
+        </p:txBody>
+      </p:sp>
+      <p:sp>
+        <p:nvSpPr>
+          <p:cNvPr id="51" name="TextBox 50"/>
+          <p:cNvSpPr txBox="1"/>
+          <p:nvPr/>
+        </p:nvSpPr>
+        <p:spPr>
+          <a:xfrm>
+            <a:off x="7790688" y="4270248"/>
+            <a:ext cx="1828800" cy="274320"/>
+          </a:xfrm>
+          <a:prstGeom prst="rect">
+            <a:avLst/>
+          </a:prstGeom>
+          <a:noFill/>
+        </p:spPr>
+        <p:txBody>
+          <a:bodyPr wrap="square" lIns="0" rIns="0" tIns="0" bIns="0">
+            <a:spAutoFit/>
+          </a:bodyPr>
+          <a:lstStyle/>
+          <a:p>
+            <a:pPr algn="l">
+              <a:lnSpc>
+                <a:spcPct val="100000"/>
+              </a:lnSpc>
+              <a:spcBef>
+                <a:spcPts val="0"/>
+              </a:spcBef>
+              <a:spcAft>
+                <a:spcPts val="0"/>
+              </a:spcAft>
+            </a:pPr>
+            <a:r>
+              <a:rPr sz="1150" b="0">
+                <a:solidFill>
+                  <a:srgbClr val="101828"/>
+                </a:solidFill>
+                <a:latin typeface="Consolas"/>
+              </a:rPr>
+              <a:t>91.28</a:t>
+            </a:r>
+          </a:p>
+        </p:txBody>
+      </p:sp>
+      <p:sp>
+        <p:nvSpPr>
+          <p:cNvPr id="52" name="TextBox 51"/>
+          <p:cNvSpPr txBox="1"/>
+          <p:nvPr/>
+        </p:nvSpPr>
+        <p:spPr>
+          <a:xfrm>
+            <a:off x="9619488" y="4270248"/>
+            <a:ext cx="1828800" cy="274320"/>
+          </a:xfrm>
+          <a:prstGeom prst="rect">
+            <a:avLst/>
+          </a:prstGeom>
+          <a:noFill/>
+        </p:spPr>
+        <p:txBody>
+          <a:bodyPr wrap="square" lIns="0" rIns="0" tIns="0" bIns="0">
+            <a:spAutoFit/>
+          </a:bodyPr>
+          <a:lstStyle/>
+          <a:p>
+            <a:pPr algn="l">
+              <a:lnSpc>
+                <a:spcPct val="100000"/>
+              </a:lnSpc>
+              <a:spcBef>
+                <a:spcPts val="0"/>
+              </a:spcBef>
+              <a:spcAft>
+                <a:spcPts val="0"/>
+              </a:spcAft>
+            </a:pPr>
+            <a:r>
+              <a:rPr sz="1150" b="0">
+                <a:solidFill>
+                  <a:srgbClr val="101828"/>
+                </a:solidFill>
+                <a:latin typeface="Consolas"/>
+              </a:rPr>
+              <a:t>0.9564</a:t>
+            </a:r>
+          </a:p>
+        </p:txBody>
+      </p:sp>
+      <p:sp>
+        <p:nvSpPr>
+          <p:cNvPr id="53" name="Rectangle 52"/>
           <p:cNvSpPr/>
           <p:nvPr/>
         </p:nvSpPr>
         <p:spPr>
           <a:xfrm>
-            <a:off x="658368" y="4828032"/>
-            <a:ext cx="10881360" cy="603504"/>
+            <a:off x="658368" y="4581144"/>
+            <a:ext cx="10789920" cy="9525"/>
+          </a:xfrm>
+          <a:prstGeom prst="rect">
+            <a:avLst/>
+          </a:prstGeom>
+          <a:solidFill>
+            <a:srgbClr val="DBE3EC"/>
+          </a:solidFill>
+          <a:ln>
+            <a:noFill/>
+          </a:ln>
+          <a:effectLst/>
+        </p:spPr>
+        <p:style>
+          <a:lnRef idx="1">
+            <a:schemeClr val="accent1"/>
+          </a:lnRef>
+          <a:fillRef idx="3">
+            <a:schemeClr val="accent1"/>
+          </a:fillRef>
+          <a:effectRef idx="2">
+            <a:schemeClr val="accent1"/>
+          </a:effectRef>
+          <a:fontRef idx="minor">
+            <a:schemeClr val="lt1"/>
+          </a:fontRef>
+        </p:style>
+        <p:txBody>
+          <a:bodyPr rtlCol="0" anchor="ctr" wrap="square"/>
+          <a:lstStyle/>
+          <a:p>
+            <a:pPr algn="ctr"/>
+          </a:p>
+        </p:txBody>
+      </p:sp>
+      <p:sp>
+        <p:nvSpPr>
+          <p:cNvPr id="54" name="TextBox 53"/>
+          <p:cNvSpPr txBox="1"/>
+          <p:nvPr/>
+        </p:nvSpPr>
+        <p:spPr>
+          <a:xfrm>
+            <a:off x="658368" y="4585716"/>
+            <a:ext cx="3200400" cy="274320"/>
+          </a:xfrm>
+          <a:prstGeom prst="rect">
+            <a:avLst/>
+          </a:prstGeom>
+          <a:noFill/>
+        </p:spPr>
+        <p:txBody>
+          <a:bodyPr wrap="square" lIns="0" rIns="0" tIns="0" bIns="0">
+            <a:spAutoFit/>
+          </a:bodyPr>
+          <a:lstStyle/>
+          <a:p>
+            <a:pPr algn="l">
+              <a:lnSpc>
+                <a:spcPct val="100000"/>
+              </a:lnSpc>
+              <a:spcBef>
+                <a:spcPts val="0"/>
+              </a:spcBef>
+              <a:spcAft>
+                <a:spcPts val="0"/>
+              </a:spcAft>
+            </a:pPr>
+            <a:r>
+              <a:rPr sz="1150" b="0">
+                <a:solidFill>
+                  <a:srgbClr val="475467"/>
+                </a:solidFill>
+                <a:latin typeface="Segoe UI"/>
+              </a:rPr>
+              <a:t>Crop classifier, 6 classes</a:t>
+            </a:r>
+          </a:p>
+        </p:txBody>
+      </p:sp>
+      <p:sp>
+        <p:nvSpPr>
+          <p:cNvPr id="55" name="TextBox 54"/>
+          <p:cNvSpPr txBox="1"/>
+          <p:nvPr/>
+        </p:nvSpPr>
+        <p:spPr>
+          <a:xfrm>
+            <a:off x="3858768" y="4585716"/>
+            <a:ext cx="2286000" cy="274320"/>
+          </a:xfrm>
+          <a:prstGeom prst="rect">
+            <a:avLst/>
+          </a:prstGeom>
+          <a:noFill/>
+        </p:spPr>
+        <p:txBody>
+          <a:bodyPr wrap="square" lIns="0" rIns="0" tIns="0" bIns="0">
+            <a:spAutoFit/>
+          </a:bodyPr>
+          <a:lstStyle/>
+          <a:p>
+            <a:pPr algn="l">
+              <a:lnSpc>
+                <a:spcPct val="100000"/>
+              </a:lnSpc>
+              <a:spcBef>
+                <a:spcPts val="0"/>
+              </a:spcBef>
+              <a:spcAft>
+                <a:spcPts val="0"/>
+              </a:spcAft>
+            </a:pPr>
+            <a:r>
+              <a:rPr sz="1150" b="0">
+                <a:solidFill>
+                  <a:srgbClr val="475467"/>
+                </a:solidFill>
+                <a:latin typeface="Segoe UI"/>
+              </a:rPr>
+              <a:t>AgriFieldNet India</a:t>
+            </a:r>
+          </a:p>
+        </p:txBody>
+      </p:sp>
+      <p:sp>
+        <p:nvSpPr>
+          <p:cNvPr id="56" name="TextBox 55"/>
+          <p:cNvSpPr txBox="1"/>
+          <p:nvPr/>
+        </p:nvSpPr>
+        <p:spPr>
+          <a:xfrm>
+            <a:off x="6144768" y="4585716"/>
+            <a:ext cx="1645920" cy="274320"/>
+          </a:xfrm>
+          <a:prstGeom prst="rect">
+            <a:avLst/>
+          </a:prstGeom>
+          <a:noFill/>
+        </p:spPr>
+        <p:txBody>
+          <a:bodyPr wrap="square" lIns="0" rIns="0" tIns="0" bIns="0">
+            <a:spAutoFit/>
+          </a:bodyPr>
+          <a:lstStyle/>
+          <a:p>
+            <a:pPr algn="l">
+              <a:lnSpc>
+                <a:spcPct val="100000"/>
+              </a:lnSpc>
+              <a:spcBef>
+                <a:spcPts val="0"/>
+              </a:spcBef>
+              <a:spcAft>
+                <a:spcPts val="0"/>
+              </a:spcAft>
+            </a:pPr>
+            <a:r>
+              <a:rPr sz="1150" b="0">
+                <a:solidFill>
+                  <a:srgbClr val="101828"/>
+                </a:solidFill>
+                <a:latin typeface="Consolas"/>
+              </a:rPr>
+              <a:t>147,409 px</a:t>
+            </a:r>
+          </a:p>
+        </p:txBody>
+      </p:sp>
+      <p:sp>
+        <p:nvSpPr>
+          <p:cNvPr id="57" name="TextBox 56"/>
+          <p:cNvSpPr txBox="1"/>
+          <p:nvPr/>
+        </p:nvSpPr>
+        <p:spPr>
+          <a:xfrm>
+            <a:off x="7790688" y="4585716"/>
+            <a:ext cx="1828800" cy="274320"/>
+          </a:xfrm>
+          <a:prstGeom prst="rect">
+            <a:avLst/>
+          </a:prstGeom>
+          <a:noFill/>
+        </p:spPr>
+        <p:txBody>
+          <a:bodyPr wrap="square" lIns="0" rIns="0" tIns="0" bIns="0">
+            <a:spAutoFit/>
+          </a:bodyPr>
+          <a:lstStyle/>
+          <a:p>
+            <a:pPr algn="l">
+              <a:lnSpc>
+                <a:spcPct val="100000"/>
+              </a:lnSpc>
+              <a:spcBef>
+                <a:spcPts val="0"/>
+              </a:spcBef>
+              <a:spcAft>
+                <a:spcPts val="0"/>
+              </a:spcAft>
+            </a:pPr>
+            <a:r>
+              <a:rPr sz="1150" b="0">
+                <a:solidFill>
+                  <a:srgbClr val="101828"/>
+                </a:solidFill>
+                <a:latin typeface="Consolas"/>
+              </a:rPr>
+              <a:t>macro-F1 0.507</a:t>
+            </a:r>
+          </a:p>
+        </p:txBody>
+      </p:sp>
+      <p:sp>
+        <p:nvSpPr>
+          <p:cNvPr id="58" name="TextBox 57"/>
+          <p:cNvSpPr txBox="1"/>
+          <p:nvPr/>
+        </p:nvSpPr>
+        <p:spPr>
+          <a:xfrm>
+            <a:off x="9619488" y="4585716"/>
+            <a:ext cx="1828800" cy="274320"/>
+          </a:xfrm>
+          <a:prstGeom prst="rect">
+            <a:avLst/>
+          </a:prstGeom>
+          <a:noFill/>
+        </p:spPr>
+        <p:txBody>
+          <a:bodyPr wrap="square" lIns="0" rIns="0" tIns="0" bIns="0">
+            <a:spAutoFit/>
+          </a:bodyPr>
+          <a:lstStyle/>
+          <a:p>
+            <a:pPr algn="l">
+              <a:lnSpc>
+                <a:spcPct val="100000"/>
+              </a:lnSpc>
+              <a:spcBef>
+                <a:spcPts val="0"/>
+              </a:spcBef>
+              <a:spcAft>
+                <a:spcPts val="0"/>
+              </a:spcAft>
+            </a:pPr>
+            <a:r>
+              <a:rPr sz="1150" b="0">
+                <a:solidFill>
+                  <a:srgbClr val="101828"/>
+                </a:solidFill>
+                <a:latin typeface="Consolas"/>
+              </a:rPr>
+              <a:t>—</a:t>
+            </a:r>
+          </a:p>
+        </p:txBody>
+      </p:sp>
+      <p:sp>
+        <p:nvSpPr>
+          <p:cNvPr id="59" name="Rectangle 58"/>
+          <p:cNvSpPr/>
+          <p:nvPr/>
+        </p:nvSpPr>
+        <p:spPr>
+          <a:xfrm>
+            <a:off x="658368" y="4896612"/>
+            <a:ext cx="10789920" cy="9525"/>
+          </a:xfrm>
+          <a:prstGeom prst="rect">
+            <a:avLst/>
+          </a:prstGeom>
+          <a:solidFill>
+            <a:srgbClr val="DBE3EC"/>
+          </a:solidFill>
+          <a:ln>
+            <a:noFill/>
+          </a:ln>
+          <a:effectLst/>
+        </p:spPr>
+        <p:style>
+          <a:lnRef idx="1">
+            <a:schemeClr val="accent1"/>
+          </a:lnRef>
+          <a:fillRef idx="3">
+            <a:schemeClr val="accent1"/>
+          </a:fillRef>
+          <a:effectRef idx="2">
+            <a:schemeClr val="accent1"/>
+          </a:effectRef>
+          <a:fontRef idx="minor">
+            <a:schemeClr val="lt1"/>
+          </a:fontRef>
+        </p:style>
+        <p:txBody>
+          <a:bodyPr rtlCol="0" anchor="ctr" wrap="square"/>
+          <a:lstStyle/>
+          <a:p>
+            <a:pPr algn="ctr"/>
+          </a:p>
+        </p:txBody>
+      </p:sp>
+      <p:sp>
+        <p:nvSpPr>
+          <p:cNvPr id="60" name="Rectangle 59"/>
+          <p:cNvSpPr/>
+          <p:nvPr/>
+        </p:nvSpPr>
+        <p:spPr>
+          <a:xfrm>
+            <a:off x="658368" y="4864608"/>
+            <a:ext cx="10881360" cy="566928"/>
           </a:xfrm>
           <a:prstGeom prst="rect">
             <a:avLst/>
@@ -21880,14 +22418,14 @@
       </p:sp>
       <p:sp>
         <p:nvSpPr>
-          <p:cNvPr id="49" name="Rectangle 48"/>
+          <p:cNvPr id="61" name="Rectangle 60"/>
           <p:cNvSpPr/>
           <p:nvPr/>
         </p:nvSpPr>
         <p:spPr>
           <a:xfrm>
-            <a:off x="658368" y="4828032"/>
-            <a:ext cx="36576" cy="603504"/>
+            <a:off x="658368" y="4864608"/>
+            <a:ext cx="36576" cy="566928"/>
           </a:xfrm>
           <a:prstGeom prst="rect">
             <a:avLst/>
@@ -21924,14 +22462,14 @@
       </p:sp>
       <p:sp>
         <p:nvSpPr>
-          <p:cNvPr id="50" name="TextBox 49"/>
-          <p:cNvSpPr txBox="1"/>
-          <p:nvPr/>
-        </p:nvSpPr>
-        <p:spPr>
-          <a:xfrm>
-            <a:off x="859536" y="4946904"/>
-            <a:ext cx="10497312" cy="365760"/>
+          <p:cNvPr id="62" name="TextBox 61"/>
+          <p:cNvSpPr txBox="1"/>
+          <p:nvPr/>
+        </p:nvSpPr>
+        <p:spPr>
+          <a:xfrm>
+            <a:off x="859536" y="4983480"/>
+            <a:ext cx="10497312" cy="329184"/>
           </a:xfrm>
           <a:prstGeom prst="rect">
             <a:avLst/>
@@ -21962,21 +22500,21 @@
                 </a:solidFill>
                 <a:latin typeface="Segoe UI"/>
               </a:rPr>
-              <a:t>The bottom row of each pair is a later, stronger run using more data and more models. The earlier rows are kept rather than replaced, because a baseline you deleted is a baseline nobody can check.</a:t>
-            </a:r>
-          </a:p>
-        </p:txBody>
-      </p:sp>
-      <p:sp>
-        <p:nvSpPr>
-          <p:cNvPr id="51" name="Rectangle 50"/>
+              <a:t>Earlier, weaker runs are kept rather than replaced — a baseline you deleted is a baseline nobody can check.</a:t>
+            </a:r>
+          </a:p>
+        </p:txBody>
+      </p:sp>
+      <p:sp>
+        <p:nvSpPr>
+          <p:cNvPr id="63" name="Rectangle 62"/>
           <p:cNvSpPr/>
           <p:nvPr/>
         </p:nvSpPr>
         <p:spPr>
           <a:xfrm>
-            <a:off x="658368" y="5559552"/>
-            <a:ext cx="10881360" cy="603504"/>
+            <a:off x="658368" y="5596128"/>
+            <a:ext cx="10881360" cy="566928"/>
           </a:xfrm>
           <a:prstGeom prst="rect">
             <a:avLst/>
@@ -22013,14 +22551,14 @@
       </p:sp>
       <p:sp>
         <p:nvSpPr>
-          <p:cNvPr id="52" name="Rectangle 51"/>
+          <p:cNvPr id="64" name="Rectangle 63"/>
           <p:cNvSpPr/>
           <p:nvPr/>
         </p:nvSpPr>
         <p:spPr>
           <a:xfrm>
-            <a:off x="658368" y="5559552"/>
-            <a:ext cx="36576" cy="603504"/>
+            <a:off x="658368" y="5596128"/>
+            <a:ext cx="36576" cy="566928"/>
           </a:xfrm>
           <a:prstGeom prst="rect">
             <a:avLst/>
@@ -22057,14 +22595,14 @@
       </p:sp>
       <p:sp>
         <p:nvSpPr>
-          <p:cNvPr id="53" name="TextBox 52"/>
-          <p:cNvSpPr txBox="1"/>
-          <p:nvPr/>
-        </p:nvSpPr>
-        <p:spPr>
-          <a:xfrm>
-            <a:off x="859536" y="5678424"/>
-            <a:ext cx="10497312" cy="365760"/>
+          <p:cNvPr id="65" name="TextBox 64"/>
+          <p:cNvSpPr txBox="1"/>
+          <p:nvPr/>
+        </p:nvSpPr>
+        <p:spPr>
+          <a:xfrm>
+            <a:off x="859536" y="5715000"/>
+            <a:ext cx="10497312" cy="329184"/>
           </a:xfrm>
           <a:prstGeom prst="rect">
             <a:avLst/>
@@ -22095,7 +22633,7 @@
                 </a:solidFill>
                 <a:latin typeface="Segoe UI"/>
               </a:rPr>
-              <a:t>These come from real public loan data — US mortgages and consumer credit — not this bank's customers. They prove the software works. They are not proof about this book.</a:t>
+              <a:t>All real public data — US mortgages, card fraud, Indian crop imagery — but not this bank's customers. Proof the software works, not proof about this book.</a:t>
             </a:r>
           </a:p>
         </p:txBody>

--- a/Lending_Hub_EPIC_8.pptx
+++ b/Lending_Hub_EPIC_8.pptx
@@ -19946,7 +19946,7 @@
                 </a:solidFill>
                 <a:latin typeface="Segoe UI"/>
               </a:rPr>
-              <a:t>Every model family with data behind it, trained on real public datasets.</a:t>
+              <a:t>The best model from each family. Nineteen were trained across four families; these are the winners, each selected on a validation split and scored once on data it never saw.</a:t>
             </a:r>
           </a:p>
         </p:txBody>
@@ -19959,7 +19959,7 @@
         </p:nvSpPr>
         <p:spPr>
           <a:xfrm>
-            <a:off x="658368" y="2029968"/>
+            <a:off x="658368" y="2240280"/>
             <a:ext cx="3200400" cy="228600"/>
           </a:xfrm>
           <a:prstGeom prst="rect">
@@ -19991,7 +19991,7 @@
                 </a:solidFill>
                 <a:latin typeface="Consolas"/>
               </a:rPr>
-              <a:t>MODEL</a:t>
+              <a:t>MODULE</a:t>
             </a:r>
           </a:p>
         </p:txBody>
@@ -20004,7 +20004,7 @@
         </p:nvSpPr>
         <p:spPr>
           <a:xfrm>
-            <a:off x="3858768" y="2029968"/>
+            <a:off x="3858768" y="2240280"/>
             <a:ext cx="2286000" cy="228600"/>
           </a:xfrm>
           <a:prstGeom prst="rect">
@@ -20049,7 +20049,7 @@
         </p:nvSpPr>
         <p:spPr>
           <a:xfrm>
-            <a:off x="6144768" y="2029968"/>
+            <a:off x="6144768" y="2240280"/>
             <a:ext cx="1645920" cy="228600"/>
           </a:xfrm>
           <a:prstGeom prst="rect">
@@ -20081,7 +20081,7 @@
                 </a:solidFill>
                 <a:latin typeface="Consolas"/>
               </a:rPr>
-              <a:t>ROWS</a:t>
+              <a:t>TRAINED ON</a:t>
             </a:r>
           </a:p>
         </p:txBody>
@@ -20094,7 +20094,7 @@
         </p:nvSpPr>
         <p:spPr>
           <a:xfrm>
-            <a:off x="7790688" y="2029968"/>
+            <a:off x="7790688" y="2240280"/>
             <a:ext cx="1828800" cy="228600"/>
           </a:xfrm>
           <a:prstGeom prst="rect">
@@ -20126,7 +20126,7 @@
                 </a:solidFill>
                 <a:latin typeface="Consolas"/>
               </a:rPr>
-              <a:t>TEST GINI</a:t>
+              <a:t>GINI</a:t>
             </a:r>
           </a:p>
         </p:txBody>
@@ -20139,7 +20139,7 @@
         </p:nvSpPr>
         <p:spPr>
           <a:xfrm>
-            <a:off x="9619488" y="2029968"/>
+            <a:off x="9619488" y="2240280"/>
             <a:ext cx="1828800" cy="228600"/>
           </a:xfrm>
           <a:prstGeom prst="rect">
@@ -20184,7 +20184,7 @@
         </p:nvSpPr>
         <p:spPr>
           <a:xfrm>
-            <a:off x="658368" y="2304288"/>
+            <a:off x="658368" y="2514600"/>
             <a:ext cx="10789920" cy="12700"/>
           </a:xfrm>
           <a:prstGeom prst="rect">
@@ -20228,7 +20228,7 @@
         </p:nvSpPr>
         <p:spPr>
           <a:xfrm>
-            <a:off x="658368" y="2377440"/>
+            <a:off x="658368" y="2660904"/>
             <a:ext cx="3200400" cy="274320"/>
           </a:xfrm>
           <a:prstGeom prst="rect">
@@ -20260,7 +20260,7 @@
                 </a:solidFill>
                 <a:latin typeface="Segoe UI"/>
               </a:rPr>
-              <a:t>Scorecard, plain-English rules</a:t>
+              <a:t>Credit scoring</a:t>
             </a:r>
           </a:p>
         </p:txBody>
@@ -20273,7 +20273,7 @@
         </p:nvSpPr>
         <p:spPr>
           <a:xfrm>
-            <a:off x="3858768" y="2377440"/>
+            <a:off x="3858768" y="2660904"/>
             <a:ext cx="2286000" cy="274320"/>
           </a:xfrm>
           <a:prstGeom prst="rect">
@@ -20305,7 +20305,7 @@
                 </a:solidFill>
                 <a:latin typeface="Segoe UI"/>
               </a:rPr>
-              <a:t>Home Credit</a:t>
+              <a:t>Home Credit applications</a:t>
             </a:r>
           </a:p>
         </p:txBody>
@@ -20318,7 +20318,7 @@
         </p:nvSpPr>
         <p:spPr>
           <a:xfrm>
-            <a:off x="6144768" y="2377440"/>
+            <a:off x="6144768" y="2660904"/>
             <a:ext cx="1645920" cy="274320"/>
           </a:xfrm>
           <a:prstGeom prst="rect">
@@ -20350,7 +20350,7 @@
                 </a:solidFill>
                 <a:latin typeface="Consolas"/>
               </a:rPr>
-              <a:t>150,000</a:t>
+              <a:t>307,511</a:t>
             </a:r>
           </a:p>
         </p:txBody>
@@ -20363,7 +20363,7 @@
         </p:nvSpPr>
         <p:spPr>
           <a:xfrm>
-            <a:off x="7790688" y="2377440"/>
+            <a:off x="7790688" y="2660904"/>
             <a:ext cx="1828800" cy="274320"/>
           </a:xfrm>
           <a:prstGeom prst="rect">
@@ -20395,7 +20395,7 @@
                 </a:solidFill>
                 <a:latin typeface="Consolas"/>
               </a:rPr>
-              <a:t>46.86</a:t>
+              <a:t>55.94</a:t>
             </a:r>
           </a:p>
         </p:txBody>
@@ -20408,7 +20408,7 @@
         </p:nvSpPr>
         <p:spPr>
           <a:xfrm>
-            <a:off x="9619488" y="2377440"/>
+            <a:off x="9619488" y="2660904"/>
             <a:ext cx="1828800" cy="274320"/>
           </a:xfrm>
           <a:prstGeom prst="rect">
@@ -20440,7 +20440,7 @@
                 </a:solidFill>
                 <a:latin typeface="Consolas"/>
               </a:rPr>
-              <a:t>0.7343</a:t>
+              <a:t>0.7797</a:t>
             </a:r>
           </a:p>
         </p:txBody>
@@ -20453,7 +20453,7 @@
         </p:nvSpPr>
         <p:spPr>
           <a:xfrm>
-            <a:off x="658368" y="2688336"/>
+            <a:off x="658368" y="2971800"/>
             <a:ext cx="10789920" cy="9525"/>
           </a:xfrm>
           <a:prstGeom prst="rect">
@@ -20497,7 +20497,7 @@
         </p:nvSpPr>
         <p:spPr>
           <a:xfrm>
-            <a:off x="658368" y="2692908"/>
+            <a:off x="658368" y="3136392"/>
             <a:ext cx="3200400" cy="274320"/>
           </a:xfrm>
           <a:prstGeom prst="rect">
@@ -20529,7 +20529,7 @@
                 </a:solidFill>
                 <a:latin typeface="Segoe UI"/>
               </a:rPr>
-              <a:t>Boosted trees</a:t>
+              <a:t>Fraud detection</a:t>
             </a:r>
           </a:p>
         </p:txBody>
@@ -20542,7 +20542,7 @@
         </p:nvSpPr>
         <p:spPr>
           <a:xfrm>
-            <a:off x="3858768" y="2692908"/>
+            <a:off x="3858768" y="3136392"/>
             <a:ext cx="2286000" cy="274320"/>
           </a:xfrm>
           <a:prstGeom prst="rect">
@@ -20574,7 +20574,7 @@
                 </a:solidFill>
                 <a:latin typeface="Segoe UI"/>
               </a:rPr>
-              <a:t>Home Credit</a:t>
+              <a:t>IEEE-CIS card transactions</a:t>
             </a:r>
           </a:p>
         </p:txBody>
@@ -20587,7 +20587,7 @@
         </p:nvSpPr>
         <p:spPr>
           <a:xfrm>
-            <a:off x="6144768" y="2692908"/>
+            <a:off x="6144768" y="3136392"/>
             <a:ext cx="1645920" cy="274320"/>
           </a:xfrm>
           <a:prstGeom prst="rect">
@@ -20619,7 +20619,7 @@
                 </a:solidFill>
                 <a:latin typeface="Consolas"/>
               </a:rPr>
-              <a:t>150,000</a:t>
+              <a:t>590,540</a:t>
             </a:r>
           </a:p>
         </p:txBody>
@@ -20632,7 +20632,7 @@
         </p:nvSpPr>
         <p:spPr>
           <a:xfrm>
-            <a:off x="7790688" y="2692908"/>
+            <a:off x="7790688" y="3136392"/>
             <a:ext cx="1828800" cy="274320"/>
           </a:xfrm>
           <a:prstGeom prst="rect">
@@ -20664,7 +20664,7 @@
                 </a:solidFill>
                 <a:latin typeface="Consolas"/>
               </a:rPr>
-              <a:t>51.94</a:t>
+              <a:t>91.28</a:t>
             </a:r>
           </a:p>
         </p:txBody>
@@ -20677,7 +20677,7 @@
         </p:nvSpPr>
         <p:spPr>
           <a:xfrm>
-            <a:off x="9619488" y="2692908"/>
+            <a:off x="9619488" y="3136392"/>
             <a:ext cx="1828800" cy="274320"/>
           </a:xfrm>
           <a:prstGeom prst="rect">
@@ -20709,7 +20709,7 @@
                 </a:solidFill>
                 <a:latin typeface="Consolas"/>
               </a:rPr>
-              <a:t>0.7597</a:t>
+              <a:t>0.9564</a:t>
             </a:r>
           </a:p>
         </p:txBody>
@@ -20722,7 +20722,7 @@
         </p:nvSpPr>
         <p:spPr>
           <a:xfrm>
-            <a:off x="658368" y="3003804"/>
+            <a:off x="658368" y="3447288"/>
             <a:ext cx="10789920" cy="9525"/>
           </a:xfrm>
           <a:prstGeom prst="rect">
@@ -20766,7 +20766,7 @@
         </p:nvSpPr>
         <p:spPr>
           <a:xfrm>
-            <a:off x="658368" y="3008376"/>
+            <a:off x="658368" y="3611880"/>
             <a:ext cx="3200400" cy="274320"/>
           </a:xfrm>
           <a:prstGeom prst="rect">
@@ -20798,7 +20798,7 @@
                 </a:solidFill>
                 <a:latin typeface="Segoe UI"/>
               </a:rPr>
-              <a:t>Ensemble of 7 models</a:t>
+              <a:t>Default prediction</a:t>
             </a:r>
           </a:p>
         </p:txBody>
@@ -20811,7 +20811,7 @@
         </p:nvSpPr>
         <p:spPr>
           <a:xfrm>
-            <a:off x="3858768" y="3008376"/>
+            <a:off x="3858768" y="3611880"/>
             <a:ext cx="2286000" cy="274320"/>
           </a:xfrm>
           <a:prstGeom prst="rect">
@@ -20843,7 +20843,7 @@
                 </a:solidFill>
                 <a:latin typeface="Segoe UI"/>
               </a:rPr>
-              <a:t>Home Credit</a:t>
+              <a:t>Fannie Mae mortgage panel</a:t>
             </a:r>
           </a:p>
         </p:txBody>
@@ -20856,7 +20856,7 @@
         </p:nvSpPr>
         <p:spPr>
           <a:xfrm>
-            <a:off x="6144768" y="3008376"/>
+            <a:off x="6144768" y="3611880"/>
             <a:ext cx="1645920" cy="274320"/>
           </a:xfrm>
           <a:prstGeom prst="rect">
@@ -20888,7 +20888,7 @@
                 </a:solidFill>
                 <a:latin typeface="Consolas"/>
               </a:rPr>
-              <a:t>307,511</a:t>
+              <a:t>230,543</a:t>
             </a:r>
           </a:p>
         </p:txBody>
@@ -20901,7 +20901,7 @@
         </p:nvSpPr>
         <p:spPr>
           <a:xfrm>
-            <a:off x="7790688" y="3008376"/>
+            <a:off x="7790688" y="3611880"/>
             <a:ext cx="1828800" cy="274320"/>
           </a:xfrm>
           <a:prstGeom prst="rect">
@@ -20933,7 +20933,7 @@
                 </a:solidFill>
                 <a:latin typeface="Consolas"/>
               </a:rPr>
-              <a:t>55.94</a:t>
+              <a:t>76.35</a:t>
             </a:r>
           </a:p>
         </p:txBody>
@@ -20946,7 +20946,7 @@
         </p:nvSpPr>
         <p:spPr>
           <a:xfrm>
-            <a:off x="9619488" y="3008376"/>
+            <a:off x="9619488" y="3611880"/>
             <a:ext cx="1828800" cy="274320"/>
           </a:xfrm>
           <a:prstGeom prst="rect">
@@ -20978,7 +20978,7 @@
                 </a:solidFill>
                 <a:latin typeface="Consolas"/>
               </a:rPr>
-              <a:t>0.7797</a:t>
+              <a:t>0.8818</a:t>
             </a:r>
           </a:p>
         </p:txBody>
@@ -20991,7 +20991,7 @@
         </p:nvSpPr>
         <p:spPr>
           <a:xfrm>
-            <a:off x="658368" y="3319272"/>
+            <a:off x="658368" y="3922776"/>
             <a:ext cx="10789920" cy="9525"/>
           </a:xfrm>
           <a:prstGeom prst="rect">
@@ -21035,7 +21035,7 @@
         </p:nvSpPr>
         <p:spPr>
           <a:xfrm>
-            <a:off x="658368" y="3323844"/>
+            <a:off x="658368" y="4087368"/>
             <a:ext cx="3200400" cy="274320"/>
           </a:xfrm>
           <a:prstGeom prst="rect">
@@ -21067,7 +21067,7 @@
                 </a:solidFill>
                 <a:latin typeface="Segoe UI"/>
               </a:rPr>
-              <a:t>Discrete-time hazard</a:t>
+              <a:t>Crop classification</a:t>
             </a:r>
           </a:p>
         </p:txBody>
@@ -21080,7 +21080,7 @@
         </p:nvSpPr>
         <p:spPr>
           <a:xfrm>
-            <a:off x="3858768" y="3323844"/>
+            <a:off x="3858768" y="4087368"/>
             <a:ext cx="2286000" cy="274320"/>
           </a:xfrm>
           <a:prstGeom prst="rect">
@@ -21112,7 +21112,7 @@
                 </a:solidFill>
                 <a:latin typeface="Segoe UI"/>
               </a:rPr>
-              <a:t>Fannie Mae panel</a:t>
+              <a:t>AgriFieldNet India</a:t>
             </a:r>
           </a:p>
         </p:txBody>
@@ -21125,7 +21125,7 @@
         </p:nvSpPr>
         <p:spPr>
           <a:xfrm>
-            <a:off x="6144768" y="3323844"/>
+            <a:off x="6144768" y="4087368"/>
             <a:ext cx="1645920" cy="274320"/>
           </a:xfrm>
           <a:prstGeom prst="rect">
@@ -21157,7 +21157,7 @@
                 </a:solidFill>
                 <a:latin typeface="Consolas"/>
               </a:rPr>
-              <a:t>338,210</a:t>
+              <a:t>147,409 px</a:t>
             </a:r>
           </a:p>
         </p:txBody>
@@ -21170,7 +21170,7 @@
         </p:nvSpPr>
         <p:spPr>
           <a:xfrm>
-            <a:off x="7790688" y="3323844"/>
+            <a:off x="7790688" y="4087368"/>
             <a:ext cx="1828800" cy="274320"/>
           </a:xfrm>
           <a:prstGeom prst="rect">
@@ -21202,52 +21202,52 @@
                 </a:solidFill>
                 <a:latin typeface="Consolas"/>
               </a:rPr>
+              <a:t>macro-F1 0.52</a:t>
+            </a:r>
+          </a:p>
+        </p:txBody>
+      </p:sp>
+      <p:sp>
+        <p:nvSpPr>
+          <p:cNvPr id="34" name="TextBox 33"/>
+          <p:cNvSpPr txBox="1"/>
+          <p:nvPr/>
+        </p:nvSpPr>
+        <p:spPr>
+          <a:xfrm>
+            <a:off x="9619488" y="4087368"/>
+            <a:ext cx="1828800" cy="274320"/>
+          </a:xfrm>
+          <a:prstGeom prst="rect">
+            <a:avLst/>
+          </a:prstGeom>
+          <a:noFill/>
+        </p:spPr>
+        <p:txBody>
+          <a:bodyPr wrap="square" lIns="0" rIns="0" tIns="0" bIns="0">
+            <a:spAutoFit/>
+          </a:bodyPr>
+          <a:lstStyle/>
+          <a:p>
+            <a:pPr algn="l">
+              <a:lnSpc>
+                <a:spcPct val="100000"/>
+              </a:lnSpc>
+              <a:spcBef>
+                <a:spcPts val="0"/>
+              </a:spcBef>
+              <a:spcAft>
+                <a:spcPts val="0"/>
+              </a:spcAft>
+            </a:pPr>
+            <a:r>
+              <a:rPr sz="1150" b="0">
+                <a:solidFill>
+                  <a:srgbClr val="101828"/>
+                </a:solidFill>
+                <a:latin typeface="Consolas"/>
+              </a:rPr>
               <a:t>—</a:t>
-            </a:r>
-          </a:p>
-        </p:txBody>
-      </p:sp>
-      <p:sp>
-        <p:nvSpPr>
-          <p:cNvPr id="34" name="TextBox 33"/>
-          <p:cNvSpPr txBox="1"/>
-          <p:nvPr/>
-        </p:nvSpPr>
-        <p:spPr>
-          <a:xfrm>
-            <a:off x="9619488" y="3323844"/>
-            <a:ext cx="1828800" cy="274320"/>
-          </a:xfrm>
-          <a:prstGeom prst="rect">
-            <a:avLst/>
-          </a:prstGeom>
-          <a:noFill/>
-        </p:spPr>
-        <p:txBody>
-          <a:bodyPr wrap="square" lIns="0" rIns="0" tIns="0" bIns="0">
-            <a:spAutoFit/>
-          </a:bodyPr>
-          <a:lstStyle/>
-          <a:p>
-            <a:pPr algn="l">
-              <a:lnSpc>
-                <a:spcPct val="100000"/>
-              </a:lnSpc>
-              <a:spcBef>
-                <a:spcPts val="0"/>
-              </a:spcBef>
-              <a:spcAft>
-                <a:spcPts val="0"/>
-              </a:spcAft>
-            </a:pPr>
-            <a:r>
-              <a:rPr sz="1150" b="0">
-                <a:solidFill>
-                  <a:srgbClr val="101828"/>
-                </a:solidFill>
-                <a:latin typeface="Consolas"/>
-              </a:rPr>
-              <a:t>0.6127</a:t>
             </a:r>
           </a:p>
         </p:txBody>
@@ -21260,7 +21260,7 @@
         </p:nvSpPr>
         <p:spPr>
           <a:xfrm>
-            <a:off x="658368" y="3634740"/>
+            <a:off x="658368" y="4398264"/>
             <a:ext cx="10789920" cy="9525"/>
           </a:xfrm>
           <a:prstGeom prst="rect">
@@ -21298,1083 +21298,7 @@
       </p:sp>
       <p:sp>
         <p:nvSpPr>
-          <p:cNvPr id="36" name="TextBox 35"/>
-          <p:cNvSpPr txBox="1"/>
-          <p:nvPr/>
-        </p:nvSpPr>
-        <p:spPr>
-          <a:xfrm>
-            <a:off x="658368" y="3639312"/>
-            <a:ext cx="3200400" cy="274320"/>
-          </a:xfrm>
-          <a:prstGeom prst="rect">
-            <a:avLst/>
-          </a:prstGeom>
-          <a:noFill/>
-        </p:spPr>
-        <p:txBody>
-          <a:bodyPr wrap="square" lIns="0" rIns="0" tIns="0" bIns="0">
-            <a:spAutoFit/>
-          </a:bodyPr>
-          <a:lstStyle/>
-          <a:p>
-            <a:pPr algn="l">
-              <a:lnSpc>
-                <a:spcPct val="100000"/>
-              </a:lnSpc>
-              <a:spcBef>
-                <a:spcPts val="0"/>
-              </a:spcBef>
-              <a:spcAft>
-                <a:spcPts val="0"/>
-              </a:spcAft>
-            </a:pPr>
-            <a:r>
-              <a:rPr sz="1150" b="0">
-                <a:solidFill>
-                  <a:srgbClr val="475467"/>
-                </a:solidFill>
-                <a:latin typeface="Segoe UI"/>
-              </a:rPr>
-              <a:t>Cox survival model</a:t>
-            </a:r>
-          </a:p>
-        </p:txBody>
-      </p:sp>
-      <p:sp>
-        <p:nvSpPr>
-          <p:cNvPr id="37" name="TextBox 36"/>
-          <p:cNvSpPr txBox="1"/>
-          <p:nvPr/>
-        </p:nvSpPr>
-        <p:spPr>
-          <a:xfrm>
-            <a:off x="3858768" y="3639312"/>
-            <a:ext cx="2286000" cy="274320"/>
-          </a:xfrm>
-          <a:prstGeom prst="rect">
-            <a:avLst/>
-          </a:prstGeom>
-          <a:noFill/>
-        </p:spPr>
-        <p:txBody>
-          <a:bodyPr wrap="square" lIns="0" rIns="0" tIns="0" bIns="0">
-            <a:spAutoFit/>
-          </a:bodyPr>
-          <a:lstStyle/>
-          <a:p>
-            <a:pPr algn="l">
-              <a:lnSpc>
-                <a:spcPct val="100000"/>
-              </a:lnSpc>
-              <a:spcBef>
-                <a:spcPts val="0"/>
-              </a:spcBef>
-              <a:spcAft>
-                <a:spcPts val="0"/>
-              </a:spcAft>
-            </a:pPr>
-            <a:r>
-              <a:rPr sz="1150" b="0">
-                <a:solidFill>
-                  <a:srgbClr val="475467"/>
-                </a:solidFill>
-                <a:latin typeface="Segoe UI"/>
-              </a:rPr>
-              <a:t>Fannie Mae panel</a:t>
-            </a:r>
-          </a:p>
-        </p:txBody>
-      </p:sp>
-      <p:sp>
-        <p:nvSpPr>
-          <p:cNvPr id="38" name="TextBox 37"/>
-          <p:cNvSpPr txBox="1"/>
-          <p:nvPr/>
-        </p:nvSpPr>
-        <p:spPr>
-          <a:xfrm>
-            <a:off x="6144768" y="3639312"/>
-            <a:ext cx="1645920" cy="274320"/>
-          </a:xfrm>
-          <a:prstGeom prst="rect">
-            <a:avLst/>
-          </a:prstGeom>
-          <a:noFill/>
-        </p:spPr>
-        <p:txBody>
-          <a:bodyPr wrap="square" lIns="0" rIns="0" tIns="0" bIns="0">
-            <a:spAutoFit/>
-          </a:bodyPr>
-          <a:lstStyle/>
-          <a:p>
-            <a:pPr algn="l">
-              <a:lnSpc>
-                <a:spcPct val="100000"/>
-              </a:lnSpc>
-              <a:spcBef>
-                <a:spcPts val="0"/>
-              </a:spcBef>
-              <a:spcAft>
-                <a:spcPts val="0"/>
-              </a:spcAft>
-            </a:pPr>
-            <a:r>
-              <a:rPr sz="1150" b="0">
-                <a:solidFill>
-                  <a:srgbClr val="101828"/>
-                </a:solidFill>
-                <a:latin typeface="Consolas"/>
-              </a:rPr>
-              <a:t>338,210</a:t>
-            </a:r>
-          </a:p>
-        </p:txBody>
-      </p:sp>
-      <p:sp>
-        <p:nvSpPr>
-          <p:cNvPr id="39" name="TextBox 38"/>
-          <p:cNvSpPr txBox="1"/>
-          <p:nvPr/>
-        </p:nvSpPr>
-        <p:spPr>
-          <a:xfrm>
-            <a:off x="7790688" y="3639312"/>
-            <a:ext cx="1828800" cy="274320"/>
-          </a:xfrm>
-          <a:prstGeom prst="rect">
-            <a:avLst/>
-          </a:prstGeom>
-          <a:noFill/>
-        </p:spPr>
-        <p:txBody>
-          <a:bodyPr wrap="square" lIns="0" rIns="0" tIns="0" bIns="0">
-            <a:spAutoFit/>
-          </a:bodyPr>
-          <a:lstStyle/>
-          <a:p>
-            <a:pPr algn="l">
-              <a:lnSpc>
-                <a:spcPct val="100000"/>
-              </a:lnSpc>
-              <a:spcBef>
-                <a:spcPts val="0"/>
-              </a:spcBef>
-              <a:spcAft>
-                <a:spcPts val="0"/>
-              </a:spcAft>
-            </a:pPr>
-            <a:r>
-              <a:rPr sz="1150" b="0">
-                <a:solidFill>
-                  <a:srgbClr val="101828"/>
-                </a:solidFill>
-                <a:latin typeface="Consolas"/>
-              </a:rPr>
-              <a:t>c-idx 0.6967</a:t>
-            </a:r>
-          </a:p>
-        </p:txBody>
-      </p:sp>
-      <p:sp>
-        <p:nvSpPr>
-          <p:cNvPr id="40" name="TextBox 39"/>
-          <p:cNvSpPr txBox="1"/>
-          <p:nvPr/>
-        </p:nvSpPr>
-        <p:spPr>
-          <a:xfrm>
-            <a:off x="9619488" y="3639312"/>
-            <a:ext cx="1828800" cy="274320"/>
-          </a:xfrm>
-          <a:prstGeom prst="rect">
-            <a:avLst/>
-          </a:prstGeom>
-          <a:noFill/>
-        </p:spPr>
-        <p:txBody>
-          <a:bodyPr wrap="square" lIns="0" rIns="0" tIns="0" bIns="0">
-            <a:spAutoFit/>
-          </a:bodyPr>
-          <a:lstStyle/>
-          <a:p>
-            <a:pPr algn="l">
-              <a:lnSpc>
-                <a:spcPct val="100000"/>
-              </a:lnSpc>
-              <a:spcBef>
-                <a:spcPts val="0"/>
-              </a:spcBef>
-              <a:spcAft>
-                <a:spcPts val="0"/>
-              </a:spcAft>
-            </a:pPr>
-            <a:r>
-              <a:rPr sz="1150" b="0">
-                <a:solidFill>
-                  <a:srgbClr val="101828"/>
-                </a:solidFill>
-                <a:latin typeface="Consolas"/>
-              </a:rPr>
-              <a:t>—</a:t>
-            </a:r>
-          </a:p>
-        </p:txBody>
-      </p:sp>
-      <p:sp>
-        <p:nvSpPr>
-          <p:cNvPr id="41" name="Rectangle 40"/>
-          <p:cNvSpPr/>
-          <p:nvPr/>
-        </p:nvSpPr>
-        <p:spPr>
-          <a:xfrm>
-            <a:off x="658368" y="3950208"/>
-            <a:ext cx="10789920" cy="9525"/>
-          </a:xfrm>
-          <a:prstGeom prst="rect">
-            <a:avLst/>
-          </a:prstGeom>
-          <a:solidFill>
-            <a:srgbClr val="DBE3EC"/>
-          </a:solidFill>
-          <a:ln>
-            <a:noFill/>
-          </a:ln>
-          <a:effectLst/>
-        </p:spPr>
-        <p:style>
-          <a:lnRef idx="1">
-            <a:schemeClr val="accent1"/>
-          </a:lnRef>
-          <a:fillRef idx="3">
-            <a:schemeClr val="accent1"/>
-          </a:fillRef>
-          <a:effectRef idx="2">
-            <a:schemeClr val="accent1"/>
-          </a:effectRef>
-          <a:fontRef idx="minor">
-            <a:schemeClr val="lt1"/>
-          </a:fontRef>
-        </p:style>
-        <p:txBody>
-          <a:bodyPr rtlCol="0" anchor="ctr" wrap="square"/>
-          <a:lstStyle/>
-          <a:p>
-            <a:pPr algn="ctr"/>
-          </a:p>
-        </p:txBody>
-      </p:sp>
-      <p:sp>
-        <p:nvSpPr>
-          <p:cNvPr id="42" name="TextBox 41"/>
-          <p:cNvSpPr txBox="1"/>
-          <p:nvPr/>
-        </p:nvSpPr>
-        <p:spPr>
-          <a:xfrm>
-            <a:off x="658368" y="3954780"/>
-            <a:ext cx="3200400" cy="274320"/>
-          </a:xfrm>
-          <a:prstGeom prst="rect">
-            <a:avLst/>
-          </a:prstGeom>
-          <a:noFill/>
-        </p:spPr>
-        <p:txBody>
-          <a:bodyPr wrap="square" lIns="0" rIns="0" tIns="0" bIns="0">
-            <a:spAutoFit/>
-          </a:bodyPr>
-          <a:lstStyle/>
-          <a:p>
-            <a:pPr algn="l">
-              <a:lnSpc>
-                <a:spcPct val="100000"/>
-              </a:lnSpc>
-              <a:spcBef>
-                <a:spcPts val="0"/>
-              </a:spcBef>
-              <a:spcAft>
-                <a:spcPts val="0"/>
-              </a:spcAft>
-            </a:pPr>
-            <a:r>
-              <a:rPr sz="1150" b="0">
-                <a:solidFill>
-                  <a:srgbClr val="475467"/>
-                </a:solidFill>
-                <a:latin typeface="Segoe UI"/>
-              </a:rPr>
-              <a:t>Behaviour model, 12-month view</a:t>
-            </a:r>
-          </a:p>
-        </p:txBody>
-      </p:sp>
-      <p:sp>
-        <p:nvSpPr>
-          <p:cNvPr id="43" name="TextBox 42"/>
-          <p:cNvSpPr txBox="1"/>
-          <p:nvPr/>
-        </p:nvSpPr>
-        <p:spPr>
-          <a:xfrm>
-            <a:off x="3858768" y="3954780"/>
-            <a:ext cx="2286000" cy="274320"/>
-          </a:xfrm>
-          <a:prstGeom prst="rect">
-            <a:avLst/>
-          </a:prstGeom>
-          <a:noFill/>
-        </p:spPr>
-        <p:txBody>
-          <a:bodyPr wrap="square" lIns="0" rIns="0" tIns="0" bIns="0">
-            <a:spAutoFit/>
-          </a:bodyPr>
-          <a:lstStyle/>
-          <a:p>
-            <a:pPr algn="l">
-              <a:lnSpc>
-                <a:spcPct val="100000"/>
-              </a:lnSpc>
-              <a:spcBef>
-                <a:spcPts val="0"/>
-              </a:spcBef>
-              <a:spcAft>
-                <a:spcPts val="0"/>
-              </a:spcAft>
-            </a:pPr>
-            <a:r>
-              <a:rPr sz="1150" b="0">
-                <a:solidFill>
-                  <a:srgbClr val="475467"/>
-                </a:solidFill>
-                <a:latin typeface="Segoe UI"/>
-              </a:rPr>
-              <a:t>Fannie Mae panel</a:t>
-            </a:r>
-          </a:p>
-        </p:txBody>
-      </p:sp>
-      <p:sp>
-        <p:nvSpPr>
-          <p:cNvPr id="44" name="TextBox 43"/>
-          <p:cNvSpPr txBox="1"/>
-          <p:nvPr/>
-        </p:nvSpPr>
-        <p:spPr>
-          <a:xfrm>
-            <a:off x="6144768" y="3954780"/>
-            <a:ext cx="1645920" cy="274320"/>
-          </a:xfrm>
-          <a:prstGeom prst="rect">
-            <a:avLst/>
-          </a:prstGeom>
-          <a:noFill/>
-        </p:spPr>
-        <p:txBody>
-          <a:bodyPr wrap="square" lIns="0" rIns="0" tIns="0" bIns="0">
-            <a:spAutoFit/>
-          </a:bodyPr>
-          <a:lstStyle/>
-          <a:p>
-            <a:pPr algn="l">
-              <a:lnSpc>
-                <a:spcPct val="100000"/>
-              </a:lnSpc>
-              <a:spcBef>
-                <a:spcPts val="0"/>
-              </a:spcBef>
-              <a:spcAft>
-                <a:spcPts val="0"/>
-              </a:spcAft>
-            </a:pPr>
-            <a:r>
-              <a:rPr sz="1150" b="0">
-                <a:solidFill>
-                  <a:srgbClr val="101828"/>
-                </a:solidFill>
-                <a:latin typeface="Consolas"/>
-              </a:rPr>
-              <a:t>230,543</a:t>
-            </a:r>
-          </a:p>
-        </p:txBody>
-      </p:sp>
-      <p:sp>
-        <p:nvSpPr>
-          <p:cNvPr id="45" name="TextBox 44"/>
-          <p:cNvSpPr txBox="1"/>
-          <p:nvPr/>
-        </p:nvSpPr>
-        <p:spPr>
-          <a:xfrm>
-            <a:off x="7790688" y="3954780"/>
-            <a:ext cx="1828800" cy="274320"/>
-          </a:xfrm>
-          <a:prstGeom prst="rect">
-            <a:avLst/>
-          </a:prstGeom>
-          <a:noFill/>
-        </p:spPr>
-        <p:txBody>
-          <a:bodyPr wrap="square" lIns="0" rIns="0" tIns="0" bIns="0">
-            <a:spAutoFit/>
-          </a:bodyPr>
-          <a:lstStyle/>
-          <a:p>
-            <a:pPr algn="l">
-              <a:lnSpc>
-                <a:spcPct val="100000"/>
-              </a:lnSpc>
-              <a:spcBef>
-                <a:spcPts val="0"/>
-              </a:spcBef>
-              <a:spcAft>
-                <a:spcPts val="0"/>
-              </a:spcAft>
-            </a:pPr>
-            <a:r>
-              <a:rPr sz="1150" b="0">
-                <a:solidFill>
-                  <a:srgbClr val="101828"/>
-                </a:solidFill>
-                <a:latin typeface="Consolas"/>
-              </a:rPr>
-              <a:t>76.35</a:t>
-            </a:r>
-          </a:p>
-        </p:txBody>
-      </p:sp>
-      <p:sp>
-        <p:nvSpPr>
-          <p:cNvPr id="46" name="TextBox 45"/>
-          <p:cNvSpPr txBox="1"/>
-          <p:nvPr/>
-        </p:nvSpPr>
-        <p:spPr>
-          <a:xfrm>
-            <a:off x="9619488" y="3954780"/>
-            <a:ext cx="1828800" cy="274320"/>
-          </a:xfrm>
-          <a:prstGeom prst="rect">
-            <a:avLst/>
-          </a:prstGeom>
-          <a:noFill/>
-        </p:spPr>
-        <p:txBody>
-          <a:bodyPr wrap="square" lIns="0" rIns="0" tIns="0" bIns="0">
-            <a:spAutoFit/>
-          </a:bodyPr>
-          <a:lstStyle/>
-          <a:p>
-            <a:pPr algn="l">
-              <a:lnSpc>
-                <a:spcPct val="100000"/>
-              </a:lnSpc>
-              <a:spcBef>
-                <a:spcPts val="0"/>
-              </a:spcBef>
-              <a:spcAft>
-                <a:spcPts val="0"/>
-              </a:spcAft>
-            </a:pPr>
-            <a:r>
-              <a:rPr sz="1150" b="0">
-                <a:solidFill>
-                  <a:srgbClr val="101828"/>
-                </a:solidFill>
-                <a:latin typeface="Consolas"/>
-              </a:rPr>
-              <a:t>0.8818</a:t>
-            </a:r>
-          </a:p>
-        </p:txBody>
-      </p:sp>
-      <p:sp>
-        <p:nvSpPr>
-          <p:cNvPr id="47" name="Rectangle 46"/>
-          <p:cNvSpPr/>
-          <p:nvPr/>
-        </p:nvSpPr>
-        <p:spPr>
-          <a:xfrm>
-            <a:off x="658368" y="4265676"/>
-            <a:ext cx="10789920" cy="9525"/>
-          </a:xfrm>
-          <a:prstGeom prst="rect">
-            <a:avLst/>
-          </a:prstGeom>
-          <a:solidFill>
-            <a:srgbClr val="DBE3EC"/>
-          </a:solidFill>
-          <a:ln>
-            <a:noFill/>
-          </a:ln>
-          <a:effectLst/>
-        </p:spPr>
-        <p:style>
-          <a:lnRef idx="1">
-            <a:schemeClr val="accent1"/>
-          </a:lnRef>
-          <a:fillRef idx="3">
-            <a:schemeClr val="accent1"/>
-          </a:fillRef>
-          <a:effectRef idx="2">
-            <a:schemeClr val="accent1"/>
-          </a:effectRef>
-          <a:fontRef idx="minor">
-            <a:schemeClr val="lt1"/>
-          </a:fontRef>
-        </p:style>
-        <p:txBody>
-          <a:bodyPr rtlCol="0" anchor="ctr" wrap="square"/>
-          <a:lstStyle/>
-          <a:p>
-            <a:pPr algn="ctr"/>
-          </a:p>
-        </p:txBody>
-      </p:sp>
-      <p:sp>
-        <p:nvSpPr>
-          <p:cNvPr id="48" name="TextBox 47"/>
-          <p:cNvSpPr txBox="1"/>
-          <p:nvPr/>
-        </p:nvSpPr>
-        <p:spPr>
-          <a:xfrm>
-            <a:off x="658368" y="4270248"/>
-            <a:ext cx="3200400" cy="274320"/>
-          </a:xfrm>
-          <a:prstGeom prst="rect">
-            <a:avLst/>
-          </a:prstGeom>
-          <a:noFill/>
-        </p:spPr>
-        <p:txBody>
-          <a:bodyPr wrap="square" lIns="0" rIns="0" tIns="0" bIns="0">
-            <a:spAutoFit/>
-          </a:bodyPr>
-          <a:lstStyle/>
-          <a:p>
-            <a:pPr algn="l">
-              <a:lnSpc>
-                <a:spcPct val="100000"/>
-              </a:lnSpc>
-              <a:spcBef>
-                <a:spcPts val="0"/>
-              </a:spcBef>
-              <a:spcAft>
-                <a:spcPts val="0"/>
-              </a:spcAft>
-            </a:pPr>
-            <a:r>
-              <a:rPr sz="1150" b="0">
-                <a:solidFill>
-                  <a:srgbClr val="475467"/>
-                </a:solidFill>
-                <a:latin typeface="Segoe UI"/>
-              </a:rPr>
-              <a:t>Fraud, 3-model ensemble</a:t>
-            </a:r>
-          </a:p>
-        </p:txBody>
-      </p:sp>
-      <p:sp>
-        <p:nvSpPr>
-          <p:cNvPr id="49" name="TextBox 48"/>
-          <p:cNvSpPr txBox="1"/>
-          <p:nvPr/>
-        </p:nvSpPr>
-        <p:spPr>
-          <a:xfrm>
-            <a:off x="3858768" y="4270248"/>
-            <a:ext cx="2286000" cy="274320"/>
-          </a:xfrm>
-          <a:prstGeom prst="rect">
-            <a:avLst/>
-          </a:prstGeom>
-          <a:noFill/>
-        </p:spPr>
-        <p:txBody>
-          <a:bodyPr wrap="square" lIns="0" rIns="0" tIns="0" bIns="0">
-            <a:spAutoFit/>
-          </a:bodyPr>
-          <a:lstStyle/>
-          <a:p>
-            <a:pPr algn="l">
-              <a:lnSpc>
-                <a:spcPct val="100000"/>
-              </a:lnSpc>
-              <a:spcBef>
-                <a:spcPts val="0"/>
-              </a:spcBef>
-              <a:spcAft>
-                <a:spcPts val="0"/>
-              </a:spcAft>
-            </a:pPr>
-            <a:r>
-              <a:rPr sz="1150" b="0">
-                <a:solidFill>
-                  <a:srgbClr val="475467"/>
-                </a:solidFill>
-                <a:latin typeface="Segoe UI"/>
-              </a:rPr>
-              <a:t>IEEE-CIS</a:t>
-            </a:r>
-          </a:p>
-        </p:txBody>
-      </p:sp>
-      <p:sp>
-        <p:nvSpPr>
-          <p:cNvPr id="50" name="TextBox 49"/>
-          <p:cNvSpPr txBox="1"/>
-          <p:nvPr/>
-        </p:nvSpPr>
-        <p:spPr>
-          <a:xfrm>
-            <a:off x="6144768" y="4270248"/>
-            <a:ext cx="1645920" cy="274320"/>
-          </a:xfrm>
-          <a:prstGeom prst="rect">
-            <a:avLst/>
-          </a:prstGeom>
-          <a:noFill/>
-        </p:spPr>
-        <p:txBody>
-          <a:bodyPr wrap="square" lIns="0" rIns="0" tIns="0" bIns="0">
-            <a:spAutoFit/>
-          </a:bodyPr>
-          <a:lstStyle/>
-          <a:p>
-            <a:pPr algn="l">
-              <a:lnSpc>
-                <a:spcPct val="100000"/>
-              </a:lnSpc>
-              <a:spcBef>
-                <a:spcPts val="0"/>
-              </a:spcBef>
-              <a:spcAft>
-                <a:spcPts val="0"/>
-              </a:spcAft>
-            </a:pPr>
-            <a:r>
-              <a:rPr sz="1150" b="0">
-                <a:solidFill>
-                  <a:srgbClr val="101828"/>
-                </a:solidFill>
-                <a:latin typeface="Consolas"/>
-              </a:rPr>
-              <a:t>590,540</a:t>
-            </a:r>
-          </a:p>
-        </p:txBody>
-      </p:sp>
-      <p:sp>
-        <p:nvSpPr>
-          <p:cNvPr id="51" name="TextBox 50"/>
-          <p:cNvSpPr txBox="1"/>
-          <p:nvPr/>
-        </p:nvSpPr>
-        <p:spPr>
-          <a:xfrm>
-            <a:off x="7790688" y="4270248"/>
-            <a:ext cx="1828800" cy="274320"/>
-          </a:xfrm>
-          <a:prstGeom prst="rect">
-            <a:avLst/>
-          </a:prstGeom>
-          <a:noFill/>
-        </p:spPr>
-        <p:txBody>
-          <a:bodyPr wrap="square" lIns="0" rIns="0" tIns="0" bIns="0">
-            <a:spAutoFit/>
-          </a:bodyPr>
-          <a:lstStyle/>
-          <a:p>
-            <a:pPr algn="l">
-              <a:lnSpc>
-                <a:spcPct val="100000"/>
-              </a:lnSpc>
-              <a:spcBef>
-                <a:spcPts val="0"/>
-              </a:spcBef>
-              <a:spcAft>
-                <a:spcPts val="0"/>
-              </a:spcAft>
-            </a:pPr>
-            <a:r>
-              <a:rPr sz="1150" b="0">
-                <a:solidFill>
-                  <a:srgbClr val="101828"/>
-                </a:solidFill>
-                <a:latin typeface="Consolas"/>
-              </a:rPr>
-              <a:t>91.28</a:t>
-            </a:r>
-          </a:p>
-        </p:txBody>
-      </p:sp>
-      <p:sp>
-        <p:nvSpPr>
-          <p:cNvPr id="52" name="TextBox 51"/>
-          <p:cNvSpPr txBox="1"/>
-          <p:nvPr/>
-        </p:nvSpPr>
-        <p:spPr>
-          <a:xfrm>
-            <a:off x="9619488" y="4270248"/>
-            <a:ext cx="1828800" cy="274320"/>
-          </a:xfrm>
-          <a:prstGeom prst="rect">
-            <a:avLst/>
-          </a:prstGeom>
-          <a:noFill/>
-        </p:spPr>
-        <p:txBody>
-          <a:bodyPr wrap="square" lIns="0" rIns="0" tIns="0" bIns="0">
-            <a:spAutoFit/>
-          </a:bodyPr>
-          <a:lstStyle/>
-          <a:p>
-            <a:pPr algn="l">
-              <a:lnSpc>
-                <a:spcPct val="100000"/>
-              </a:lnSpc>
-              <a:spcBef>
-                <a:spcPts val="0"/>
-              </a:spcBef>
-              <a:spcAft>
-                <a:spcPts val="0"/>
-              </a:spcAft>
-            </a:pPr>
-            <a:r>
-              <a:rPr sz="1150" b="0">
-                <a:solidFill>
-                  <a:srgbClr val="101828"/>
-                </a:solidFill>
-                <a:latin typeface="Consolas"/>
-              </a:rPr>
-              <a:t>0.9564</a:t>
-            </a:r>
-          </a:p>
-        </p:txBody>
-      </p:sp>
-      <p:sp>
-        <p:nvSpPr>
-          <p:cNvPr id="53" name="Rectangle 52"/>
-          <p:cNvSpPr/>
-          <p:nvPr/>
-        </p:nvSpPr>
-        <p:spPr>
-          <a:xfrm>
-            <a:off x="658368" y="4581144"/>
-            <a:ext cx="10789920" cy="9525"/>
-          </a:xfrm>
-          <a:prstGeom prst="rect">
-            <a:avLst/>
-          </a:prstGeom>
-          <a:solidFill>
-            <a:srgbClr val="DBE3EC"/>
-          </a:solidFill>
-          <a:ln>
-            <a:noFill/>
-          </a:ln>
-          <a:effectLst/>
-        </p:spPr>
-        <p:style>
-          <a:lnRef idx="1">
-            <a:schemeClr val="accent1"/>
-          </a:lnRef>
-          <a:fillRef idx="3">
-            <a:schemeClr val="accent1"/>
-          </a:fillRef>
-          <a:effectRef idx="2">
-            <a:schemeClr val="accent1"/>
-          </a:effectRef>
-          <a:fontRef idx="minor">
-            <a:schemeClr val="lt1"/>
-          </a:fontRef>
-        </p:style>
-        <p:txBody>
-          <a:bodyPr rtlCol="0" anchor="ctr" wrap="square"/>
-          <a:lstStyle/>
-          <a:p>
-            <a:pPr algn="ctr"/>
-          </a:p>
-        </p:txBody>
-      </p:sp>
-      <p:sp>
-        <p:nvSpPr>
-          <p:cNvPr id="54" name="TextBox 53"/>
-          <p:cNvSpPr txBox="1"/>
-          <p:nvPr/>
-        </p:nvSpPr>
-        <p:spPr>
-          <a:xfrm>
-            <a:off x="658368" y="4585716"/>
-            <a:ext cx="3200400" cy="274320"/>
-          </a:xfrm>
-          <a:prstGeom prst="rect">
-            <a:avLst/>
-          </a:prstGeom>
-          <a:noFill/>
-        </p:spPr>
-        <p:txBody>
-          <a:bodyPr wrap="square" lIns="0" rIns="0" tIns="0" bIns="0">
-            <a:spAutoFit/>
-          </a:bodyPr>
-          <a:lstStyle/>
-          <a:p>
-            <a:pPr algn="l">
-              <a:lnSpc>
-                <a:spcPct val="100000"/>
-              </a:lnSpc>
-              <a:spcBef>
-                <a:spcPts val="0"/>
-              </a:spcBef>
-              <a:spcAft>
-                <a:spcPts val="0"/>
-              </a:spcAft>
-            </a:pPr>
-            <a:r>
-              <a:rPr sz="1150" b="0">
-                <a:solidFill>
-                  <a:srgbClr val="475467"/>
-                </a:solidFill>
-                <a:latin typeface="Segoe UI"/>
-              </a:rPr>
-              <a:t>Crop classifier, 6 classes</a:t>
-            </a:r>
-          </a:p>
-        </p:txBody>
-      </p:sp>
-      <p:sp>
-        <p:nvSpPr>
-          <p:cNvPr id="55" name="TextBox 54"/>
-          <p:cNvSpPr txBox="1"/>
-          <p:nvPr/>
-        </p:nvSpPr>
-        <p:spPr>
-          <a:xfrm>
-            <a:off x="3858768" y="4585716"/>
-            <a:ext cx="2286000" cy="274320"/>
-          </a:xfrm>
-          <a:prstGeom prst="rect">
-            <a:avLst/>
-          </a:prstGeom>
-          <a:noFill/>
-        </p:spPr>
-        <p:txBody>
-          <a:bodyPr wrap="square" lIns="0" rIns="0" tIns="0" bIns="0">
-            <a:spAutoFit/>
-          </a:bodyPr>
-          <a:lstStyle/>
-          <a:p>
-            <a:pPr algn="l">
-              <a:lnSpc>
-                <a:spcPct val="100000"/>
-              </a:lnSpc>
-              <a:spcBef>
-                <a:spcPts val="0"/>
-              </a:spcBef>
-              <a:spcAft>
-                <a:spcPts val="0"/>
-              </a:spcAft>
-            </a:pPr>
-            <a:r>
-              <a:rPr sz="1150" b="0">
-                <a:solidFill>
-                  <a:srgbClr val="475467"/>
-                </a:solidFill>
-                <a:latin typeface="Segoe UI"/>
-              </a:rPr>
-              <a:t>AgriFieldNet India</a:t>
-            </a:r>
-          </a:p>
-        </p:txBody>
-      </p:sp>
-      <p:sp>
-        <p:nvSpPr>
-          <p:cNvPr id="56" name="TextBox 55"/>
-          <p:cNvSpPr txBox="1"/>
-          <p:nvPr/>
-        </p:nvSpPr>
-        <p:spPr>
-          <a:xfrm>
-            <a:off x="6144768" y="4585716"/>
-            <a:ext cx="1645920" cy="274320"/>
-          </a:xfrm>
-          <a:prstGeom prst="rect">
-            <a:avLst/>
-          </a:prstGeom>
-          <a:noFill/>
-        </p:spPr>
-        <p:txBody>
-          <a:bodyPr wrap="square" lIns="0" rIns="0" tIns="0" bIns="0">
-            <a:spAutoFit/>
-          </a:bodyPr>
-          <a:lstStyle/>
-          <a:p>
-            <a:pPr algn="l">
-              <a:lnSpc>
-                <a:spcPct val="100000"/>
-              </a:lnSpc>
-              <a:spcBef>
-                <a:spcPts val="0"/>
-              </a:spcBef>
-              <a:spcAft>
-                <a:spcPts val="0"/>
-              </a:spcAft>
-            </a:pPr>
-            <a:r>
-              <a:rPr sz="1150" b="0">
-                <a:solidFill>
-                  <a:srgbClr val="101828"/>
-                </a:solidFill>
-                <a:latin typeface="Consolas"/>
-              </a:rPr>
-              <a:t>147,409 px</a:t>
-            </a:r>
-          </a:p>
-        </p:txBody>
-      </p:sp>
-      <p:sp>
-        <p:nvSpPr>
-          <p:cNvPr id="57" name="TextBox 56"/>
-          <p:cNvSpPr txBox="1"/>
-          <p:nvPr/>
-        </p:nvSpPr>
-        <p:spPr>
-          <a:xfrm>
-            <a:off x="7790688" y="4585716"/>
-            <a:ext cx="1828800" cy="274320"/>
-          </a:xfrm>
-          <a:prstGeom prst="rect">
-            <a:avLst/>
-          </a:prstGeom>
-          <a:noFill/>
-        </p:spPr>
-        <p:txBody>
-          <a:bodyPr wrap="square" lIns="0" rIns="0" tIns="0" bIns="0">
-            <a:spAutoFit/>
-          </a:bodyPr>
-          <a:lstStyle/>
-          <a:p>
-            <a:pPr algn="l">
-              <a:lnSpc>
-                <a:spcPct val="100000"/>
-              </a:lnSpc>
-              <a:spcBef>
-                <a:spcPts val="0"/>
-              </a:spcBef>
-              <a:spcAft>
-                <a:spcPts val="0"/>
-              </a:spcAft>
-            </a:pPr>
-            <a:r>
-              <a:rPr sz="1150" b="0">
-                <a:solidFill>
-                  <a:srgbClr val="101828"/>
-                </a:solidFill>
-                <a:latin typeface="Consolas"/>
-              </a:rPr>
-              <a:t>macro-F1 0.507</a:t>
-            </a:r>
-          </a:p>
-        </p:txBody>
-      </p:sp>
-      <p:sp>
-        <p:nvSpPr>
-          <p:cNvPr id="58" name="TextBox 57"/>
-          <p:cNvSpPr txBox="1"/>
-          <p:nvPr/>
-        </p:nvSpPr>
-        <p:spPr>
-          <a:xfrm>
-            <a:off x="9619488" y="4585716"/>
-            <a:ext cx="1828800" cy="274320"/>
-          </a:xfrm>
-          <a:prstGeom prst="rect">
-            <a:avLst/>
-          </a:prstGeom>
-          <a:noFill/>
-        </p:spPr>
-        <p:txBody>
-          <a:bodyPr wrap="square" lIns="0" rIns="0" tIns="0" bIns="0">
-            <a:spAutoFit/>
-          </a:bodyPr>
-          <a:lstStyle/>
-          <a:p>
-            <a:pPr algn="l">
-              <a:lnSpc>
-                <a:spcPct val="100000"/>
-              </a:lnSpc>
-              <a:spcBef>
-                <a:spcPts val="0"/>
-              </a:spcBef>
-              <a:spcAft>
-                <a:spcPts val="0"/>
-              </a:spcAft>
-            </a:pPr>
-            <a:r>
-              <a:rPr sz="1150" b="0">
-                <a:solidFill>
-                  <a:srgbClr val="101828"/>
-                </a:solidFill>
-                <a:latin typeface="Consolas"/>
-              </a:rPr>
-              <a:t>—</a:t>
-            </a:r>
-          </a:p>
-        </p:txBody>
-      </p:sp>
-      <p:sp>
-        <p:nvSpPr>
-          <p:cNvPr id="59" name="Rectangle 58"/>
-          <p:cNvSpPr/>
-          <p:nvPr/>
-        </p:nvSpPr>
-        <p:spPr>
-          <a:xfrm>
-            <a:off x="658368" y="4896612"/>
-            <a:ext cx="10789920" cy="9525"/>
-          </a:xfrm>
-          <a:prstGeom prst="rect">
-            <a:avLst/>
-          </a:prstGeom>
-          <a:solidFill>
-            <a:srgbClr val="DBE3EC"/>
-          </a:solidFill>
-          <a:ln>
-            <a:noFill/>
-          </a:ln>
-          <a:effectLst/>
-        </p:spPr>
-        <p:style>
-          <a:lnRef idx="1">
-            <a:schemeClr val="accent1"/>
-          </a:lnRef>
-          <a:fillRef idx="3">
-            <a:schemeClr val="accent1"/>
-          </a:fillRef>
-          <a:effectRef idx="2">
-            <a:schemeClr val="accent1"/>
-          </a:effectRef>
-          <a:fontRef idx="minor">
-            <a:schemeClr val="lt1"/>
-          </a:fontRef>
-        </p:style>
-        <p:txBody>
-          <a:bodyPr rtlCol="0" anchor="ctr" wrap="square"/>
-          <a:lstStyle/>
-          <a:p>
-            <a:pPr algn="ctr"/>
-          </a:p>
-        </p:txBody>
-      </p:sp>
-      <p:sp>
-        <p:nvSpPr>
-          <p:cNvPr id="60" name="Rectangle 59"/>
+          <p:cNvPr id="36" name="Rectangle 35"/>
           <p:cNvSpPr/>
           <p:nvPr/>
         </p:nvSpPr>
@@ -22418,7 +21342,7 @@
       </p:sp>
       <p:sp>
         <p:nvSpPr>
-          <p:cNvPr id="61" name="Rectangle 60"/>
+          <p:cNvPr id="37" name="Rectangle 36"/>
           <p:cNvSpPr/>
           <p:nvPr/>
         </p:nvSpPr>
@@ -22462,7 +21386,7 @@
       </p:sp>
       <p:sp>
         <p:nvSpPr>
-          <p:cNvPr id="62" name="TextBox 61"/>
+          <p:cNvPr id="38" name="TextBox 37"/>
           <p:cNvSpPr txBox="1"/>
           <p:nvPr/>
         </p:nvSpPr>
@@ -22500,14 +21424,14 @@
                 </a:solidFill>
                 <a:latin typeface="Segoe UI"/>
               </a:rPr>
-              <a:t>Earlier, weaker runs are kept rather than replaced — a baseline you deleted is a baseline nobody can check.</a:t>
-            </a:r>
-          </a:p>
-        </p:txBody>
-      </p:sp>
-      <p:sp>
-        <p:nvSpPr>
-          <p:cNvPr id="63" name="Rectangle 62"/>
+              <a:t>Crop classification reports macro-F1 rather than AUC because it has six classes rather than two, and macro-F1 rather than accuracy because its smallest class is 1.7% of the data — an accuracy figure would hide that the model fails on it.</a:t>
+            </a:r>
+          </a:p>
+        </p:txBody>
+      </p:sp>
+      <p:sp>
+        <p:nvSpPr>
+          <p:cNvPr id="39" name="Rectangle 38"/>
           <p:cNvSpPr/>
           <p:nvPr/>
         </p:nvSpPr>
@@ -22551,7 +21475,7 @@
       </p:sp>
       <p:sp>
         <p:nvSpPr>
-          <p:cNvPr id="64" name="Rectangle 63"/>
+          <p:cNvPr id="40" name="Rectangle 39"/>
           <p:cNvSpPr/>
           <p:nvPr/>
         </p:nvSpPr>
@@ -22595,7 +21519,7 @@
       </p:sp>
       <p:sp>
         <p:nvSpPr>
-          <p:cNvPr id="65" name="TextBox 64"/>
+          <p:cNvPr id="41" name="TextBox 40"/>
           <p:cNvSpPr txBox="1"/>
           <p:nvPr/>
         </p:nvSpPr>
